--- a/E-Commerce Analysis Presentation_Kalyan.pptx
+++ b/E-Commerce Analysis Presentation_Kalyan.pptx
@@ -9,11 +9,11 @@
   </p:notesMasterIdLst>
   <p:sldIdLst>
     <p:sldId id="256" r:id="rId2"/>
-    <p:sldId id="257" r:id="rId3"/>
-    <p:sldId id="258" r:id="rId4"/>
-    <p:sldId id="259" r:id="rId5"/>
-    <p:sldId id="260" r:id="rId6"/>
-    <p:sldId id="261" r:id="rId7"/>
+    <p:sldId id="259" r:id="rId3"/>
+    <p:sldId id="260" r:id="rId4"/>
+    <p:sldId id="261" r:id="rId5"/>
+    <p:sldId id="257" r:id="rId6"/>
+    <p:sldId id="258" r:id="rId7"/>
     <p:sldId id="262" r:id="rId8"/>
     <p:sldId id="263" r:id="rId9"/>
     <p:sldId id="264" r:id="rId10"/>
@@ -215,7 +215,7 @@
           <a:p>
             <a:fld id="{731957B0-ED03-468A-8D17-F9F51B05F742}" type="datetimeFigureOut">
               <a:rPr lang="en-IN" smtClean="0"/>
-              <a:t>31-05-2026</a:t>
+              <a:t>22-06-2026</a:t>
             </a:fld>
             <a:endParaRPr lang="en-IN"/>
           </a:p>
@@ -709,7 +709,7 @@
           <a:p>
             <a:fld id="{E10642B7-806F-425D-90FE-EC786A818053}" type="datetimeFigureOut">
               <a:rPr lang="en-IN" smtClean="0"/>
-              <a:t>31-05-2026</a:t>
+              <a:t>22-06-2026</a:t>
             </a:fld>
             <a:endParaRPr lang="en-IN"/>
           </a:p>
@@ -917,7 +917,7 @@
           <a:p>
             <a:fld id="{E10642B7-806F-425D-90FE-EC786A818053}" type="datetimeFigureOut">
               <a:rPr lang="en-IN" smtClean="0"/>
-              <a:t>31-05-2026</a:t>
+              <a:t>22-06-2026</a:t>
             </a:fld>
             <a:endParaRPr lang="en-IN"/>
           </a:p>
@@ -1173,7 +1173,7 @@
           <a:p>
             <a:fld id="{E10642B7-806F-425D-90FE-EC786A818053}" type="datetimeFigureOut">
               <a:rPr lang="en-IN" smtClean="0"/>
-              <a:t>31-05-2026</a:t>
+              <a:t>22-06-2026</a:t>
             </a:fld>
             <a:endParaRPr lang="en-IN"/>
           </a:p>
@@ -1347,7 +1347,7 @@
           <a:p>
             <a:fld id="{E10642B7-806F-425D-90FE-EC786A818053}" type="datetimeFigureOut">
               <a:rPr lang="en-IN" smtClean="0"/>
-              <a:t>31-05-2026</a:t>
+              <a:t>22-06-2026</a:t>
             </a:fld>
             <a:endParaRPr lang="en-IN"/>
           </a:p>
@@ -1690,7 +1690,7 @@
           <a:p>
             <a:fld id="{E10642B7-806F-425D-90FE-EC786A818053}" type="datetimeFigureOut">
               <a:rPr lang="en-IN" smtClean="0"/>
-              <a:t>31-05-2026</a:t>
+              <a:t>22-06-2026</a:t>
             </a:fld>
             <a:endParaRPr lang="en-IN"/>
           </a:p>
@@ -1965,7 +1965,7 @@
           <a:p>
             <a:fld id="{E10642B7-806F-425D-90FE-EC786A818053}" type="datetimeFigureOut">
               <a:rPr lang="en-IN" smtClean="0"/>
-              <a:t>31-05-2026</a:t>
+              <a:t>22-06-2026</a:t>
             </a:fld>
             <a:endParaRPr lang="en-IN"/>
           </a:p>
@@ -2344,7 +2344,7 @@
           <a:p>
             <a:fld id="{E10642B7-806F-425D-90FE-EC786A818053}" type="datetimeFigureOut">
               <a:rPr lang="en-IN" smtClean="0"/>
-              <a:t>31-05-2026</a:t>
+              <a:t>22-06-2026</a:t>
             </a:fld>
             <a:endParaRPr lang="en-IN"/>
           </a:p>
@@ -2462,7 +2462,7 @@
           <a:p>
             <a:fld id="{E10642B7-806F-425D-90FE-EC786A818053}" type="datetimeFigureOut">
               <a:rPr lang="en-IN" smtClean="0"/>
-              <a:t>31-05-2026</a:t>
+              <a:t>22-06-2026</a:t>
             </a:fld>
             <a:endParaRPr lang="en-IN"/>
           </a:p>
@@ -2633,7 +2633,7 @@
           <a:p>
             <a:fld id="{E10642B7-806F-425D-90FE-EC786A818053}" type="datetimeFigureOut">
               <a:rPr lang="en-IN" smtClean="0"/>
-              <a:t>31-05-2026</a:t>
+              <a:t>22-06-2026</a:t>
             </a:fld>
             <a:endParaRPr lang="en-IN"/>
           </a:p>
@@ -2987,7 +2987,7 @@
           <a:p>
             <a:fld id="{E10642B7-806F-425D-90FE-EC786A818053}" type="datetimeFigureOut">
               <a:rPr lang="en-IN" smtClean="0"/>
-              <a:t>31-05-2026</a:t>
+              <a:t>22-06-2026</a:t>
             </a:fld>
             <a:endParaRPr lang="en-IN"/>
           </a:p>
@@ -3369,7 +3369,7 @@
           <a:p>
             <a:fld id="{E10642B7-806F-425D-90FE-EC786A818053}" type="datetimeFigureOut">
               <a:rPr lang="en-IN" smtClean="0"/>
-              <a:t>31-05-2026</a:t>
+              <a:t>22-06-2026</a:t>
             </a:fld>
             <a:endParaRPr lang="en-IN"/>
           </a:p>
@@ -3656,7 +3656,7 @@
           <a:p>
             <a:fld id="{E10642B7-806F-425D-90FE-EC786A818053}" type="datetimeFigureOut">
               <a:rPr lang="en-IN" smtClean="0"/>
-              <a:t>31-05-2026</a:t>
+              <a:t>22-06-2026</a:t>
             </a:fld>
             <a:endParaRPr lang="en-IN"/>
           </a:p>
@@ -6230,6 +6230,1126 @@
           <p:cNvPr id="2" name="Title 1">
             <a:extLst>
               <a:ext uri="{FF2B5EF4-FFF2-40B4-BE49-F238E27FC236}">
+                <a16:creationId xmlns:a16="http://schemas.microsoft.com/office/drawing/2014/main" id="{B8DD95B2-1B91-4A7E-2D4B-10D1AC6D3AD4}"/>
+              </a:ext>
+            </a:extLst>
+          </p:cNvPr>
+          <p:cNvSpPr>
+            <a:spLocks noGrp="1"/>
+          </p:cNvSpPr>
+          <p:nvPr>
+            <p:ph type="title"/>
+          </p:nvPr>
+        </p:nvSpPr>
+        <p:spPr>
+          <a:xfrm>
+            <a:off x="1066800" y="438880"/>
+            <a:ext cx="10058400" cy="1100051"/>
+          </a:xfrm>
+        </p:spPr>
+        <p:txBody>
+          <a:bodyPr>
+            <a:normAutofit/>
+          </a:bodyPr>
+          <a:lstStyle/>
+          <a:p>
+            <a:pPr algn="ctr"/>
+            <a:r>
+              <a:rPr lang="en-US" sz="3600" b="1" dirty="0">
+                <a:solidFill>
+                  <a:schemeClr val="accent1">
+                    <a:lumMod val="75000"/>
+                  </a:schemeClr>
+                </a:solidFill>
+                <a:latin typeface="Arial" panose="020B0604020202020204" pitchFamily="34" charset="0"/>
+                <a:cs typeface="Arial" panose="020B0604020202020204" pitchFamily="34" charset="0"/>
+              </a:rPr>
+              <a:t>Problem statement of the Project</a:t>
+            </a:r>
+            <a:endParaRPr lang="en-IN" sz="3600" b="1" dirty="0">
+              <a:solidFill>
+                <a:schemeClr val="accent1">
+                  <a:lumMod val="75000"/>
+                </a:schemeClr>
+              </a:solidFill>
+              <a:latin typeface="Arial" panose="020B0604020202020204" pitchFamily="34" charset="0"/>
+              <a:cs typeface="Arial" panose="020B0604020202020204" pitchFamily="34" charset="0"/>
+            </a:endParaRPr>
+          </a:p>
+        </p:txBody>
+      </p:sp>
+      <p:sp>
+        <p:nvSpPr>
+          <p:cNvPr id="3" name="Content Placeholder 2">
+            <a:extLst>
+              <a:ext uri="{FF2B5EF4-FFF2-40B4-BE49-F238E27FC236}">
+                <a16:creationId xmlns:a16="http://schemas.microsoft.com/office/drawing/2014/main" id="{16D8D823-44DE-7B9C-2A03-EA50E1501694}"/>
+              </a:ext>
+            </a:extLst>
+          </p:cNvPr>
+          <p:cNvSpPr>
+            <a:spLocks noGrp="1"/>
+          </p:cNvSpPr>
+          <p:nvPr>
+            <p:ph idx="1"/>
+          </p:nvPr>
+        </p:nvSpPr>
+        <p:spPr>
+          <a:xfrm>
+            <a:off x="1097280" y="1845734"/>
+            <a:ext cx="6910647" cy="4023360"/>
+          </a:xfrm>
+        </p:spPr>
+        <p:txBody>
+          <a:bodyPr anchor="ctr">
+            <a:normAutofit/>
+          </a:bodyPr>
+          <a:lstStyle/>
+          <a:p>
+            <a:r>
+              <a:rPr lang="en-US" sz="1800" b="1" i="0" u="none" strike="noStrike" dirty="0">
+                <a:solidFill>
+                  <a:srgbClr val="000000"/>
+                </a:solidFill>
+                <a:effectLst/>
+                <a:latin typeface="Arial" panose="020B0604020202020204" pitchFamily="34" charset="0"/>
+                <a:cs typeface="Arial" panose="020B0604020202020204" pitchFamily="34" charset="0"/>
+              </a:rPr>
+              <a:t>Amazon, a company currently performing well in E-commerce sector. The stakeholders wish to maintain this level of performance and seek improvement. For this purpose, they want to devise new strategies. You are part of a team exploring new ways to benefit customers, such as offering more discounts and Prime membership perks. Could you suggest additional methods to identify and reward customers and enhance their shopping experience.</a:t>
+            </a:r>
+            <a:endParaRPr lang="en-IN" sz="1800" b="1" dirty="0">
+              <a:latin typeface="Arial" panose="020B0604020202020204" pitchFamily="34" charset="0"/>
+              <a:cs typeface="Arial" panose="020B0604020202020204" pitchFamily="34" charset="0"/>
+            </a:endParaRPr>
+          </a:p>
+        </p:txBody>
+      </p:sp>
+      <p:pic>
+        <p:nvPicPr>
+          <p:cNvPr id="4" name="Picture 3">
+            <a:extLst>
+              <a:ext uri="{FF2B5EF4-FFF2-40B4-BE49-F238E27FC236}">
+                <a16:creationId xmlns:a16="http://schemas.microsoft.com/office/drawing/2014/main" id="{49F80194-B8F6-D3E0-9B30-CE8FC170BEE3}"/>
+              </a:ext>
+            </a:extLst>
+          </p:cNvPr>
+          <p:cNvPicPr>
+            <a:picLocks noChangeAspect="1"/>
+          </p:cNvPicPr>
+          <p:nvPr/>
+        </p:nvPicPr>
+        <p:blipFill>
+          <a:blip r:embed="rId2"/>
+          <a:stretch>
+            <a:fillRect/>
+          </a:stretch>
+        </p:blipFill>
+        <p:spPr>
+          <a:xfrm>
+            <a:off x="8132618" y="1845734"/>
+            <a:ext cx="2962102" cy="4236411"/>
+          </a:xfrm>
+          <a:prstGeom prst="rect">
+            <a:avLst/>
+          </a:prstGeom>
+        </p:spPr>
+      </p:pic>
+    </p:spTree>
+    <p:extLst>
+      <p:ext uri="{BB962C8B-B14F-4D97-AF65-F5344CB8AC3E}">
+        <p14:creationId xmlns:p14="http://schemas.microsoft.com/office/powerpoint/2010/main" val="377303760"/>
+      </p:ext>
+    </p:extLst>
+  </p:cSld>
+  <p:clrMapOvr>
+    <a:masterClrMapping/>
+  </p:clrMapOvr>
+</p:sld>
+</file>
+
+<file path=ppt/slides/slide3.xml><?xml version="1.0" encoding="utf-8"?>
+<p:sld xmlns:a="http://schemas.openxmlformats.org/drawingml/2006/main" xmlns:r="http://schemas.openxmlformats.org/officeDocument/2006/relationships" xmlns:p="http://schemas.openxmlformats.org/presentationml/2006/main">
+  <p:cSld>
+    <p:spTree>
+      <p:nvGrpSpPr>
+        <p:cNvPr id="1" name=""/>
+        <p:cNvGrpSpPr/>
+        <p:nvPr/>
+      </p:nvGrpSpPr>
+      <p:grpSpPr>
+        <a:xfrm>
+          <a:off x="0" y="0"/>
+          <a:ext cx="0" cy="0"/>
+          <a:chOff x="0" y="0"/>
+          <a:chExt cx="0" cy="0"/>
+        </a:xfrm>
+      </p:grpSpPr>
+      <p:sp>
+        <p:nvSpPr>
+          <p:cNvPr id="2" name="Title 1">
+            <a:extLst>
+              <a:ext uri="{FF2B5EF4-FFF2-40B4-BE49-F238E27FC236}">
+                <a16:creationId xmlns:a16="http://schemas.microsoft.com/office/drawing/2014/main" id="{0614C04C-621A-0356-6AB6-CF494F18201D}"/>
+              </a:ext>
+            </a:extLst>
+          </p:cNvPr>
+          <p:cNvSpPr>
+            <a:spLocks noGrp="1"/>
+          </p:cNvSpPr>
+          <p:nvPr>
+            <p:ph type="title"/>
+          </p:nvPr>
+        </p:nvSpPr>
+        <p:spPr>
+          <a:xfrm>
+            <a:off x="1066800" y="452735"/>
+            <a:ext cx="10058400" cy="1072342"/>
+          </a:xfrm>
+        </p:spPr>
+        <p:txBody>
+          <a:bodyPr>
+            <a:normAutofit/>
+          </a:bodyPr>
+          <a:lstStyle/>
+          <a:p>
+            <a:pPr algn="ctr"/>
+            <a:r>
+              <a:rPr lang="en-US" sz="3600" b="1" dirty="0">
+                <a:solidFill>
+                  <a:schemeClr val="accent1">
+                    <a:lumMod val="75000"/>
+                  </a:schemeClr>
+                </a:solidFill>
+                <a:latin typeface="Arial" panose="020B0604020202020204" pitchFamily="34" charset="0"/>
+                <a:cs typeface="Arial" panose="020B0604020202020204" pitchFamily="34" charset="0"/>
+              </a:rPr>
+              <a:t>Dataset Overview</a:t>
+            </a:r>
+            <a:endParaRPr lang="en-IN" sz="3600" b="1" dirty="0">
+              <a:solidFill>
+                <a:schemeClr val="accent1">
+                  <a:lumMod val="75000"/>
+                </a:schemeClr>
+              </a:solidFill>
+              <a:latin typeface="Arial" panose="020B0604020202020204" pitchFamily="34" charset="0"/>
+              <a:cs typeface="Arial" panose="020B0604020202020204" pitchFamily="34" charset="0"/>
+            </a:endParaRPr>
+          </a:p>
+        </p:txBody>
+      </p:sp>
+      <p:sp>
+        <p:nvSpPr>
+          <p:cNvPr id="3" name="Content Placeholder 2">
+            <a:extLst>
+              <a:ext uri="{FF2B5EF4-FFF2-40B4-BE49-F238E27FC236}">
+                <a16:creationId xmlns:a16="http://schemas.microsoft.com/office/drawing/2014/main" id="{15ACB221-0B50-43C8-509A-B30BBB84EA52}"/>
+              </a:ext>
+            </a:extLst>
+          </p:cNvPr>
+          <p:cNvSpPr>
+            <a:spLocks noGrp="1"/>
+          </p:cNvSpPr>
+          <p:nvPr>
+            <p:ph idx="1"/>
+          </p:nvPr>
+        </p:nvSpPr>
+        <p:spPr>
+          <a:xfrm>
+            <a:off x="1097279" y="2022764"/>
+            <a:ext cx="10058399" cy="4197926"/>
+          </a:xfrm>
+        </p:spPr>
+        <p:txBody>
+          <a:bodyPr>
+            <a:normAutofit/>
+          </a:bodyPr>
+          <a:lstStyle/>
+          <a:p>
+            <a:pPr fontAlgn="base">
+              <a:spcAft>
+                <a:spcPts val="0"/>
+              </a:spcAft>
+            </a:pPr>
+            <a:r>
+              <a:rPr lang="en-US" sz="1600" b="1" i="0" u="none" strike="noStrike" dirty="0" err="1">
+                <a:solidFill>
+                  <a:srgbClr val="000000"/>
+                </a:solidFill>
+                <a:effectLst/>
+                <a:latin typeface="Arial" panose="020B0604020202020204" pitchFamily="34" charset="0"/>
+                <a:cs typeface="Arial" panose="020B0604020202020204" pitchFamily="34" charset="0"/>
+              </a:rPr>
+              <a:t>OrderDate</a:t>
+            </a:r>
+            <a:r>
+              <a:rPr lang="en-US" sz="1600" b="1" i="0" u="none" strike="noStrike" dirty="0">
+                <a:solidFill>
+                  <a:srgbClr val="000000"/>
+                </a:solidFill>
+                <a:effectLst/>
+                <a:latin typeface="Arial" panose="020B0604020202020204" pitchFamily="34" charset="0"/>
+                <a:cs typeface="Arial" panose="020B0604020202020204" pitchFamily="34" charset="0"/>
+              </a:rPr>
+              <a:t>:</a:t>
+            </a:r>
+            <a:r>
+              <a:rPr lang="en-US" sz="1600" b="0" i="0" u="none" strike="noStrike" dirty="0">
+                <a:solidFill>
+                  <a:srgbClr val="000000"/>
+                </a:solidFill>
+                <a:effectLst/>
+                <a:latin typeface="Arial" panose="020B0604020202020204" pitchFamily="34" charset="0"/>
+                <a:cs typeface="Arial" panose="020B0604020202020204" pitchFamily="34" charset="0"/>
+              </a:rPr>
+              <a:t> The date when the order was placed.</a:t>
+            </a:r>
+            <a:endParaRPr lang="en-US" sz="1600" b="1" i="0" u="none" strike="noStrike" dirty="0">
+              <a:solidFill>
+                <a:srgbClr val="000000"/>
+              </a:solidFill>
+              <a:effectLst/>
+              <a:latin typeface="Arial" panose="020B0604020202020204" pitchFamily="34" charset="0"/>
+              <a:cs typeface="Arial" panose="020B0604020202020204" pitchFamily="34" charset="0"/>
+            </a:endParaRPr>
+          </a:p>
+          <a:p>
+            <a:pPr fontAlgn="base">
+              <a:spcAft>
+                <a:spcPts val="0"/>
+              </a:spcAft>
+            </a:pPr>
+            <a:r>
+              <a:rPr lang="en-US" sz="1600" b="1" i="0" u="none" strike="noStrike" dirty="0" err="1">
+                <a:solidFill>
+                  <a:srgbClr val="000000"/>
+                </a:solidFill>
+                <a:effectLst/>
+                <a:latin typeface="Arial" panose="020B0604020202020204" pitchFamily="34" charset="0"/>
+                <a:cs typeface="Arial" panose="020B0604020202020204" pitchFamily="34" charset="0"/>
+              </a:rPr>
+              <a:t>OrderID</a:t>
+            </a:r>
+            <a:r>
+              <a:rPr lang="en-US" sz="1600" b="1" i="0" u="none" strike="noStrike" dirty="0">
+                <a:solidFill>
+                  <a:srgbClr val="000000"/>
+                </a:solidFill>
+                <a:effectLst/>
+                <a:latin typeface="Arial" panose="020B0604020202020204" pitchFamily="34" charset="0"/>
+                <a:cs typeface="Arial" panose="020B0604020202020204" pitchFamily="34" charset="0"/>
+              </a:rPr>
+              <a:t>:</a:t>
+            </a:r>
+            <a:r>
+              <a:rPr lang="en-US" sz="1600" b="0" i="0" u="none" strike="noStrike" dirty="0">
+                <a:solidFill>
+                  <a:srgbClr val="000000"/>
+                </a:solidFill>
+                <a:effectLst/>
+                <a:latin typeface="Arial" panose="020B0604020202020204" pitchFamily="34" charset="0"/>
+                <a:cs typeface="Arial" panose="020B0604020202020204" pitchFamily="34" charset="0"/>
+              </a:rPr>
+              <a:t> A unique identifier for each order.</a:t>
+            </a:r>
+            <a:endParaRPr lang="en-US" sz="1600" b="1" i="0" u="none" strike="noStrike" dirty="0">
+              <a:solidFill>
+                <a:srgbClr val="000000"/>
+              </a:solidFill>
+              <a:effectLst/>
+              <a:latin typeface="Arial" panose="020B0604020202020204" pitchFamily="34" charset="0"/>
+              <a:cs typeface="Arial" panose="020B0604020202020204" pitchFamily="34" charset="0"/>
+            </a:endParaRPr>
+          </a:p>
+          <a:p>
+            <a:pPr fontAlgn="base">
+              <a:spcAft>
+                <a:spcPts val="0"/>
+              </a:spcAft>
+            </a:pPr>
+            <a:r>
+              <a:rPr lang="en-US" sz="1600" b="1" i="0" u="none" strike="noStrike" dirty="0">
+                <a:solidFill>
+                  <a:srgbClr val="000000"/>
+                </a:solidFill>
+                <a:effectLst/>
+                <a:latin typeface="Arial" panose="020B0604020202020204" pitchFamily="34" charset="0"/>
+                <a:cs typeface="Arial" panose="020B0604020202020204" pitchFamily="34" charset="0"/>
+              </a:rPr>
+              <a:t>Delivery Date:</a:t>
+            </a:r>
+            <a:r>
+              <a:rPr lang="en-US" sz="1600" b="0" i="0" u="none" strike="noStrike" dirty="0">
+                <a:solidFill>
+                  <a:srgbClr val="000000"/>
+                </a:solidFill>
+                <a:effectLst/>
+                <a:latin typeface="Arial" panose="020B0604020202020204" pitchFamily="34" charset="0"/>
+                <a:cs typeface="Arial" panose="020B0604020202020204" pitchFamily="34" charset="0"/>
+              </a:rPr>
+              <a:t> The date when the order is scheduled to be delivered.</a:t>
+            </a:r>
+            <a:endParaRPr lang="en-US" sz="1600" b="1" i="0" u="none" strike="noStrike" dirty="0">
+              <a:solidFill>
+                <a:srgbClr val="000000"/>
+              </a:solidFill>
+              <a:effectLst/>
+              <a:latin typeface="Arial" panose="020B0604020202020204" pitchFamily="34" charset="0"/>
+              <a:cs typeface="Arial" panose="020B0604020202020204" pitchFamily="34" charset="0"/>
+            </a:endParaRPr>
+          </a:p>
+          <a:p>
+            <a:pPr fontAlgn="base">
+              <a:spcAft>
+                <a:spcPts val="0"/>
+              </a:spcAft>
+            </a:pPr>
+            <a:r>
+              <a:rPr lang="en-US" sz="1600" b="1" i="0" u="none" strike="noStrike" dirty="0" err="1">
+                <a:solidFill>
+                  <a:srgbClr val="000000"/>
+                </a:solidFill>
+                <a:effectLst/>
+                <a:latin typeface="Arial" panose="020B0604020202020204" pitchFamily="34" charset="0"/>
+                <a:cs typeface="Arial" panose="020B0604020202020204" pitchFamily="34" charset="0"/>
+              </a:rPr>
+              <a:t>CustomerID</a:t>
+            </a:r>
+            <a:r>
+              <a:rPr lang="en-US" sz="1600" b="1" i="0" u="none" strike="noStrike" dirty="0">
+                <a:solidFill>
+                  <a:srgbClr val="000000"/>
+                </a:solidFill>
+                <a:effectLst/>
+                <a:latin typeface="Arial" panose="020B0604020202020204" pitchFamily="34" charset="0"/>
+                <a:cs typeface="Arial" panose="020B0604020202020204" pitchFamily="34" charset="0"/>
+              </a:rPr>
+              <a:t>: </a:t>
+            </a:r>
+            <a:r>
+              <a:rPr lang="en-US" sz="1600" b="0" i="0" u="none" strike="noStrike" dirty="0">
+                <a:solidFill>
+                  <a:srgbClr val="000000"/>
+                </a:solidFill>
+                <a:effectLst/>
+                <a:latin typeface="Arial" panose="020B0604020202020204" pitchFamily="34" charset="0"/>
+                <a:cs typeface="Arial" panose="020B0604020202020204" pitchFamily="34" charset="0"/>
+              </a:rPr>
+              <a:t>A unique identifier for each customer.</a:t>
+            </a:r>
+            <a:endParaRPr lang="en-US" sz="1600" b="1" i="0" u="none" strike="noStrike" dirty="0">
+              <a:solidFill>
+                <a:srgbClr val="000000"/>
+              </a:solidFill>
+              <a:effectLst/>
+              <a:latin typeface="Arial" panose="020B0604020202020204" pitchFamily="34" charset="0"/>
+              <a:cs typeface="Arial" panose="020B0604020202020204" pitchFamily="34" charset="0"/>
+            </a:endParaRPr>
+          </a:p>
+          <a:p>
+            <a:pPr fontAlgn="base">
+              <a:spcAft>
+                <a:spcPts val="0"/>
+              </a:spcAft>
+            </a:pPr>
+            <a:r>
+              <a:rPr lang="en-US" sz="1600" b="1" i="0" u="none" strike="noStrike" dirty="0">
+                <a:solidFill>
+                  <a:srgbClr val="000000"/>
+                </a:solidFill>
+                <a:effectLst/>
+                <a:latin typeface="Arial" panose="020B0604020202020204" pitchFamily="34" charset="0"/>
+                <a:cs typeface="Arial" panose="020B0604020202020204" pitchFamily="34" charset="0"/>
+              </a:rPr>
+              <a:t>Customer Age:</a:t>
+            </a:r>
+            <a:r>
+              <a:rPr lang="en-US" sz="1600" b="0" i="0" u="none" strike="noStrike" dirty="0">
+                <a:solidFill>
+                  <a:srgbClr val="000000"/>
+                </a:solidFill>
+                <a:effectLst/>
+                <a:latin typeface="Arial" panose="020B0604020202020204" pitchFamily="34" charset="0"/>
+                <a:cs typeface="Arial" panose="020B0604020202020204" pitchFamily="34" charset="0"/>
+              </a:rPr>
+              <a:t> The age of the customer.</a:t>
+            </a:r>
+            <a:endParaRPr lang="en-US" sz="1600" b="1" i="0" u="none" strike="noStrike" dirty="0">
+              <a:solidFill>
+                <a:srgbClr val="000000"/>
+              </a:solidFill>
+              <a:effectLst/>
+              <a:latin typeface="Arial" panose="020B0604020202020204" pitchFamily="34" charset="0"/>
+              <a:cs typeface="Arial" panose="020B0604020202020204" pitchFamily="34" charset="0"/>
+            </a:endParaRPr>
+          </a:p>
+          <a:p>
+            <a:pPr fontAlgn="base">
+              <a:spcAft>
+                <a:spcPts val="0"/>
+              </a:spcAft>
+            </a:pPr>
+            <a:r>
+              <a:rPr lang="en-US" sz="1600" b="1" i="0" u="none" strike="noStrike" dirty="0">
+                <a:solidFill>
+                  <a:srgbClr val="000000"/>
+                </a:solidFill>
+                <a:effectLst/>
+                <a:latin typeface="Arial" panose="020B0604020202020204" pitchFamily="34" charset="0"/>
+                <a:cs typeface="Arial" panose="020B0604020202020204" pitchFamily="34" charset="0"/>
+              </a:rPr>
+              <a:t>Customer Gender:</a:t>
+            </a:r>
+            <a:r>
+              <a:rPr lang="en-US" sz="1600" b="0" i="0" u="none" strike="noStrike" dirty="0">
+                <a:solidFill>
+                  <a:srgbClr val="000000"/>
+                </a:solidFill>
+                <a:effectLst/>
+                <a:latin typeface="Arial" panose="020B0604020202020204" pitchFamily="34" charset="0"/>
+                <a:cs typeface="Arial" panose="020B0604020202020204" pitchFamily="34" charset="0"/>
+              </a:rPr>
+              <a:t> The gender of the customer (M for male, F for female).</a:t>
+            </a:r>
+            <a:endParaRPr lang="en-US" sz="1600" b="1" i="0" u="none" strike="noStrike" dirty="0">
+              <a:solidFill>
+                <a:srgbClr val="000000"/>
+              </a:solidFill>
+              <a:effectLst/>
+              <a:latin typeface="Arial" panose="020B0604020202020204" pitchFamily="34" charset="0"/>
+              <a:cs typeface="Arial" panose="020B0604020202020204" pitchFamily="34" charset="0"/>
+            </a:endParaRPr>
+          </a:p>
+          <a:p>
+            <a:pPr fontAlgn="base">
+              <a:spcAft>
+                <a:spcPts val="0"/>
+              </a:spcAft>
+            </a:pPr>
+            <a:r>
+              <a:rPr lang="en-US" sz="1600" b="1" i="0" u="none" strike="noStrike" dirty="0">
+                <a:solidFill>
+                  <a:srgbClr val="000000"/>
+                </a:solidFill>
+                <a:effectLst/>
+                <a:latin typeface="Arial" panose="020B0604020202020204" pitchFamily="34" charset="0"/>
+                <a:cs typeface="Arial" panose="020B0604020202020204" pitchFamily="34" charset="0"/>
+              </a:rPr>
+              <a:t>Location:</a:t>
+            </a:r>
+            <a:r>
+              <a:rPr lang="en-US" sz="1600" b="0" i="0" u="none" strike="noStrike" dirty="0">
+                <a:solidFill>
+                  <a:srgbClr val="000000"/>
+                </a:solidFill>
+                <a:effectLst/>
+                <a:latin typeface="Arial" panose="020B0604020202020204" pitchFamily="34" charset="0"/>
+                <a:cs typeface="Arial" panose="020B0604020202020204" pitchFamily="34" charset="0"/>
+              </a:rPr>
+              <a:t> The geographical area where the customer is located.</a:t>
+            </a:r>
+            <a:endParaRPr lang="en-US" sz="1600" b="1" i="0" u="none" strike="noStrike" dirty="0">
+              <a:solidFill>
+                <a:srgbClr val="000000"/>
+              </a:solidFill>
+              <a:effectLst/>
+              <a:latin typeface="Arial" panose="020B0604020202020204" pitchFamily="34" charset="0"/>
+              <a:cs typeface="Arial" panose="020B0604020202020204" pitchFamily="34" charset="0"/>
+            </a:endParaRPr>
+          </a:p>
+          <a:p>
+            <a:pPr fontAlgn="base">
+              <a:spcAft>
+                <a:spcPts val="0"/>
+              </a:spcAft>
+            </a:pPr>
+            <a:r>
+              <a:rPr lang="en-US" sz="1600" b="1" i="0" u="none" strike="noStrike" dirty="0">
+                <a:solidFill>
+                  <a:srgbClr val="000000"/>
+                </a:solidFill>
+                <a:effectLst/>
+                <a:latin typeface="Arial" panose="020B0604020202020204" pitchFamily="34" charset="0"/>
+                <a:cs typeface="Arial" panose="020B0604020202020204" pitchFamily="34" charset="0"/>
+              </a:rPr>
+              <a:t>Zone: </a:t>
+            </a:r>
+            <a:r>
+              <a:rPr lang="en-US" sz="1600" b="0" i="0" u="none" strike="noStrike" dirty="0">
+                <a:solidFill>
+                  <a:srgbClr val="000000"/>
+                </a:solidFill>
+                <a:effectLst/>
+                <a:latin typeface="Arial" panose="020B0604020202020204" pitchFamily="34" charset="0"/>
+                <a:cs typeface="Arial" panose="020B0604020202020204" pitchFamily="34" charset="0"/>
+              </a:rPr>
+              <a:t>Specific zone within the location for delivery purposes.</a:t>
+            </a:r>
+            <a:endParaRPr lang="en-US" sz="1600" b="1" i="0" u="none" strike="noStrike" dirty="0">
+              <a:solidFill>
+                <a:srgbClr val="000000"/>
+              </a:solidFill>
+              <a:effectLst/>
+              <a:latin typeface="Arial" panose="020B0604020202020204" pitchFamily="34" charset="0"/>
+              <a:cs typeface="Arial" panose="020B0604020202020204" pitchFamily="34" charset="0"/>
+            </a:endParaRPr>
+          </a:p>
+          <a:p>
+            <a:pPr fontAlgn="base">
+              <a:spcAft>
+                <a:spcPts val="0"/>
+              </a:spcAft>
+            </a:pPr>
+            <a:r>
+              <a:rPr lang="en-US" sz="1600" b="1" i="0" u="none" strike="noStrike" dirty="0">
+                <a:solidFill>
+                  <a:srgbClr val="000000"/>
+                </a:solidFill>
+                <a:effectLst/>
+                <a:latin typeface="Arial" panose="020B0604020202020204" pitchFamily="34" charset="0"/>
+                <a:cs typeface="Arial" panose="020B0604020202020204" pitchFamily="34" charset="0"/>
+              </a:rPr>
+              <a:t>Delivery Type:</a:t>
+            </a:r>
+            <a:r>
+              <a:rPr lang="en-US" sz="1600" b="0" i="0" u="none" strike="noStrike" dirty="0">
+                <a:solidFill>
+                  <a:srgbClr val="000000"/>
+                </a:solidFill>
+                <a:effectLst/>
+                <a:latin typeface="Arial" panose="020B0604020202020204" pitchFamily="34" charset="0"/>
+                <a:cs typeface="Arial" panose="020B0604020202020204" pitchFamily="34" charset="0"/>
+              </a:rPr>
+              <a:t> The method by which the order is delivered (e.g., Express, Standard).</a:t>
+            </a:r>
+            <a:endParaRPr lang="en-US" sz="1600" b="1" i="0" u="none" strike="noStrike" dirty="0">
+              <a:solidFill>
+                <a:srgbClr val="000000"/>
+              </a:solidFill>
+              <a:effectLst/>
+              <a:latin typeface="Arial" panose="020B0604020202020204" pitchFamily="34" charset="0"/>
+              <a:cs typeface="Arial" panose="020B0604020202020204" pitchFamily="34" charset="0"/>
+            </a:endParaRPr>
+          </a:p>
+          <a:p>
+            <a:r>
+              <a:rPr lang="en-US" sz="1600" b="1" i="0" u="none" strike="noStrike" dirty="0">
+                <a:solidFill>
+                  <a:srgbClr val="000000"/>
+                </a:solidFill>
+                <a:effectLst/>
+                <a:latin typeface="Arial" panose="020B0604020202020204" pitchFamily="34" charset="0"/>
+                <a:cs typeface="Arial" panose="020B0604020202020204" pitchFamily="34" charset="0"/>
+              </a:rPr>
+              <a:t>Product Category:</a:t>
+            </a:r>
+            <a:r>
+              <a:rPr lang="en-US" sz="1600" b="0" i="0" u="none" strike="noStrike" dirty="0">
+                <a:solidFill>
+                  <a:srgbClr val="000000"/>
+                </a:solidFill>
+                <a:effectLst/>
+                <a:latin typeface="Arial" panose="020B0604020202020204" pitchFamily="34" charset="0"/>
+                <a:cs typeface="Arial" panose="020B0604020202020204" pitchFamily="34" charset="0"/>
+              </a:rPr>
+              <a:t> The broad category to which the product belong</a:t>
+            </a:r>
+          </a:p>
+          <a:p>
+            <a:r>
+              <a:rPr lang="en-US" sz="1700" dirty="0">
+                <a:solidFill>
+                  <a:srgbClr val="000000"/>
+                </a:solidFill>
+                <a:latin typeface="Arial" panose="020B0604020202020204" pitchFamily="34" charset="0"/>
+                <a:cs typeface="Arial" panose="020B0604020202020204" pitchFamily="34" charset="0"/>
+              </a:rPr>
+              <a:t>                                                                                                                                                     </a:t>
+            </a:r>
+          </a:p>
+        </p:txBody>
+      </p:sp>
+    </p:spTree>
+    <p:extLst>
+      <p:ext uri="{BB962C8B-B14F-4D97-AF65-F5344CB8AC3E}">
+        <p14:creationId xmlns:p14="http://schemas.microsoft.com/office/powerpoint/2010/main" val="615012478"/>
+      </p:ext>
+    </p:extLst>
+  </p:cSld>
+  <p:clrMapOvr>
+    <a:masterClrMapping/>
+  </p:clrMapOvr>
+</p:sld>
+</file>
+
+<file path=ppt/slides/slide4.xml><?xml version="1.0" encoding="utf-8"?>
+<p:sld xmlns:a="http://schemas.openxmlformats.org/drawingml/2006/main" xmlns:r="http://schemas.openxmlformats.org/officeDocument/2006/relationships" xmlns:p="http://schemas.openxmlformats.org/presentationml/2006/main">
+  <p:cSld>
+    <p:spTree>
+      <p:nvGrpSpPr>
+        <p:cNvPr id="1" name=""/>
+        <p:cNvGrpSpPr/>
+        <p:nvPr/>
+      </p:nvGrpSpPr>
+      <p:grpSpPr>
+        <a:xfrm>
+          <a:off x="0" y="0"/>
+          <a:ext cx="0" cy="0"/>
+          <a:chOff x="0" y="0"/>
+          <a:chExt cx="0" cy="0"/>
+        </a:xfrm>
+      </p:grpSpPr>
+      <p:sp>
+        <p:nvSpPr>
+          <p:cNvPr id="2" name="Title 1">
+            <a:extLst>
+              <a:ext uri="{FF2B5EF4-FFF2-40B4-BE49-F238E27FC236}">
+                <a16:creationId xmlns:a16="http://schemas.microsoft.com/office/drawing/2014/main" id="{C3DF4336-9D7A-E072-5994-384618979231}"/>
+              </a:ext>
+            </a:extLst>
+          </p:cNvPr>
+          <p:cNvSpPr>
+            <a:spLocks noGrp="1"/>
+          </p:cNvSpPr>
+          <p:nvPr>
+            <p:ph type="title"/>
+          </p:nvPr>
+        </p:nvSpPr>
+        <p:spPr>
+          <a:xfrm>
+            <a:off x="1097280" y="542790"/>
+            <a:ext cx="10058400" cy="892233"/>
+          </a:xfrm>
+        </p:spPr>
+        <p:txBody>
+          <a:bodyPr>
+            <a:normAutofit/>
+          </a:bodyPr>
+          <a:lstStyle/>
+          <a:p>
+            <a:pPr algn="ctr"/>
+            <a:r>
+              <a:rPr lang="en-US" sz="3600" b="1" dirty="0">
+                <a:solidFill>
+                  <a:schemeClr val="accent1">
+                    <a:lumMod val="75000"/>
+                  </a:schemeClr>
+                </a:solidFill>
+                <a:latin typeface="Arial" panose="020B0604020202020204" pitchFamily="34" charset="0"/>
+                <a:cs typeface="Arial" panose="020B0604020202020204" pitchFamily="34" charset="0"/>
+              </a:rPr>
+              <a:t>Dataset Overview</a:t>
+            </a:r>
+            <a:endParaRPr lang="en-IN" sz="3600" b="1" dirty="0">
+              <a:solidFill>
+                <a:schemeClr val="accent1">
+                  <a:lumMod val="75000"/>
+                </a:schemeClr>
+              </a:solidFill>
+              <a:latin typeface="Arial" panose="020B0604020202020204" pitchFamily="34" charset="0"/>
+              <a:cs typeface="Arial" panose="020B0604020202020204" pitchFamily="34" charset="0"/>
+            </a:endParaRPr>
+          </a:p>
+        </p:txBody>
+      </p:sp>
+      <p:sp>
+        <p:nvSpPr>
+          <p:cNvPr id="3" name="Content Placeholder 2">
+            <a:extLst>
+              <a:ext uri="{FF2B5EF4-FFF2-40B4-BE49-F238E27FC236}">
+                <a16:creationId xmlns:a16="http://schemas.microsoft.com/office/drawing/2014/main" id="{8DBA5C4F-DC4B-548F-496C-CA7AE6A8619D}"/>
+              </a:ext>
+            </a:extLst>
+          </p:cNvPr>
+          <p:cNvSpPr>
+            <a:spLocks noGrp="1"/>
+          </p:cNvSpPr>
+          <p:nvPr>
+            <p:ph idx="1"/>
+          </p:nvPr>
+        </p:nvSpPr>
+        <p:spPr>
+          <a:xfrm>
+            <a:off x="1097280" y="2050472"/>
+            <a:ext cx="10058400" cy="3818621"/>
+          </a:xfrm>
+        </p:spPr>
+        <p:txBody>
+          <a:bodyPr>
+            <a:normAutofit/>
+          </a:bodyPr>
+          <a:lstStyle/>
+          <a:p>
+            <a:pPr fontAlgn="base">
+              <a:spcAft>
+                <a:spcPts val="0"/>
+              </a:spcAft>
+            </a:pPr>
+            <a:r>
+              <a:rPr lang="en-US" sz="1600" b="1" i="0" u="none" strike="noStrike" dirty="0" err="1">
+                <a:solidFill>
+                  <a:srgbClr val="000000"/>
+                </a:solidFill>
+                <a:effectLst/>
+                <a:latin typeface="Arial" panose="020B0604020202020204" pitchFamily="34" charset="0"/>
+                <a:cs typeface="Arial" panose="020B0604020202020204" pitchFamily="34" charset="0"/>
+              </a:rPr>
+              <a:t>SubCategory</a:t>
+            </a:r>
+            <a:r>
+              <a:rPr lang="en-US" sz="1600" b="1" i="0" u="none" strike="noStrike" dirty="0">
+                <a:solidFill>
+                  <a:srgbClr val="000000"/>
+                </a:solidFill>
+                <a:effectLst/>
+                <a:latin typeface="Arial" panose="020B0604020202020204" pitchFamily="34" charset="0"/>
+                <a:cs typeface="Arial" panose="020B0604020202020204" pitchFamily="34" charset="0"/>
+              </a:rPr>
+              <a:t>:</a:t>
+            </a:r>
+            <a:r>
+              <a:rPr lang="en-US" sz="1600" b="0" i="0" u="none" strike="noStrike" dirty="0">
+                <a:solidFill>
+                  <a:srgbClr val="000000"/>
+                </a:solidFill>
+                <a:effectLst/>
+                <a:latin typeface="Arial" panose="020B0604020202020204" pitchFamily="34" charset="0"/>
+                <a:cs typeface="Arial" panose="020B0604020202020204" pitchFamily="34" charset="0"/>
+              </a:rPr>
+              <a:t> A more specific classification within the product category.</a:t>
+            </a:r>
+            <a:endParaRPr lang="en-US" sz="1600" b="1" i="0" u="none" strike="noStrike" dirty="0">
+              <a:solidFill>
+                <a:srgbClr val="000000"/>
+              </a:solidFill>
+              <a:effectLst/>
+              <a:latin typeface="Arial" panose="020B0604020202020204" pitchFamily="34" charset="0"/>
+              <a:cs typeface="Arial" panose="020B0604020202020204" pitchFamily="34" charset="0"/>
+            </a:endParaRPr>
+          </a:p>
+          <a:p>
+            <a:pPr fontAlgn="base">
+              <a:spcAft>
+                <a:spcPts val="0"/>
+              </a:spcAft>
+            </a:pPr>
+            <a:r>
+              <a:rPr lang="en-US" sz="1600" b="1" i="0" u="none" strike="noStrike" dirty="0">
+                <a:solidFill>
+                  <a:srgbClr val="000000"/>
+                </a:solidFill>
+                <a:effectLst/>
+                <a:latin typeface="Arial" panose="020B0604020202020204" pitchFamily="34" charset="0"/>
+                <a:cs typeface="Arial" panose="020B0604020202020204" pitchFamily="34" charset="0"/>
+              </a:rPr>
+              <a:t>Product:</a:t>
+            </a:r>
+            <a:r>
+              <a:rPr lang="en-US" sz="1600" b="0" i="0" u="none" strike="noStrike" dirty="0">
+                <a:solidFill>
+                  <a:srgbClr val="000000"/>
+                </a:solidFill>
+                <a:effectLst/>
+                <a:latin typeface="Arial" panose="020B0604020202020204" pitchFamily="34" charset="0"/>
+                <a:cs typeface="Arial" panose="020B0604020202020204" pitchFamily="34" charset="0"/>
+              </a:rPr>
+              <a:t> The name or description of the product ordered.</a:t>
+            </a:r>
+            <a:endParaRPr lang="en-US" sz="1600" b="1" i="0" u="none" strike="noStrike" dirty="0">
+              <a:solidFill>
+                <a:srgbClr val="000000"/>
+              </a:solidFill>
+              <a:effectLst/>
+              <a:latin typeface="Arial" panose="020B0604020202020204" pitchFamily="34" charset="0"/>
+              <a:cs typeface="Arial" panose="020B0604020202020204" pitchFamily="34" charset="0"/>
+            </a:endParaRPr>
+          </a:p>
+          <a:p>
+            <a:pPr fontAlgn="base">
+              <a:spcAft>
+                <a:spcPts val="0"/>
+              </a:spcAft>
+            </a:pPr>
+            <a:r>
+              <a:rPr lang="en-US" sz="1600" b="1" i="0" u="none" strike="noStrike" dirty="0">
+                <a:solidFill>
+                  <a:srgbClr val="000000"/>
+                </a:solidFill>
+                <a:effectLst/>
+                <a:latin typeface="Arial" panose="020B0604020202020204" pitchFamily="34" charset="0"/>
+                <a:cs typeface="Arial" panose="020B0604020202020204" pitchFamily="34" charset="0"/>
+              </a:rPr>
+              <a:t>Unit Price:</a:t>
+            </a:r>
+            <a:r>
+              <a:rPr lang="en-US" sz="1600" b="0" i="0" u="none" strike="noStrike" dirty="0">
+                <a:solidFill>
+                  <a:srgbClr val="000000"/>
+                </a:solidFill>
+                <a:effectLst/>
+                <a:latin typeface="Arial" panose="020B0604020202020204" pitchFamily="34" charset="0"/>
+                <a:cs typeface="Arial" panose="020B0604020202020204" pitchFamily="34" charset="0"/>
+              </a:rPr>
+              <a:t> The price per unit of the product.</a:t>
+            </a:r>
+            <a:endParaRPr lang="en-US" sz="1600" b="1" i="0" u="none" strike="noStrike" dirty="0">
+              <a:solidFill>
+                <a:srgbClr val="000000"/>
+              </a:solidFill>
+              <a:effectLst/>
+              <a:latin typeface="Arial" panose="020B0604020202020204" pitchFamily="34" charset="0"/>
+              <a:cs typeface="Arial" panose="020B0604020202020204" pitchFamily="34" charset="0"/>
+            </a:endParaRPr>
+          </a:p>
+          <a:p>
+            <a:pPr fontAlgn="base">
+              <a:spcAft>
+                <a:spcPts val="0"/>
+              </a:spcAft>
+            </a:pPr>
+            <a:r>
+              <a:rPr lang="en-US" sz="1600" b="1" i="0" u="none" strike="noStrike" dirty="0">
+                <a:solidFill>
+                  <a:srgbClr val="000000"/>
+                </a:solidFill>
+                <a:effectLst/>
+                <a:latin typeface="Arial" panose="020B0604020202020204" pitchFamily="34" charset="0"/>
+                <a:cs typeface="Arial" panose="020B0604020202020204" pitchFamily="34" charset="0"/>
+              </a:rPr>
+              <a:t>Shipping Fee:</a:t>
+            </a:r>
+            <a:r>
+              <a:rPr lang="en-US" sz="1600" b="0" i="0" u="none" strike="noStrike" dirty="0">
+                <a:solidFill>
+                  <a:srgbClr val="000000"/>
+                </a:solidFill>
+                <a:effectLst/>
+                <a:latin typeface="Arial" panose="020B0604020202020204" pitchFamily="34" charset="0"/>
+                <a:cs typeface="Arial" panose="020B0604020202020204" pitchFamily="34" charset="0"/>
+              </a:rPr>
+              <a:t> The fee charged for shipping the product.</a:t>
+            </a:r>
+            <a:endParaRPr lang="en-US" sz="1600" b="1" i="0" u="none" strike="noStrike" dirty="0">
+              <a:solidFill>
+                <a:srgbClr val="000000"/>
+              </a:solidFill>
+              <a:effectLst/>
+              <a:latin typeface="Arial" panose="020B0604020202020204" pitchFamily="34" charset="0"/>
+              <a:cs typeface="Arial" panose="020B0604020202020204" pitchFamily="34" charset="0"/>
+            </a:endParaRPr>
+          </a:p>
+          <a:p>
+            <a:pPr fontAlgn="base">
+              <a:spcAft>
+                <a:spcPts val="0"/>
+              </a:spcAft>
+            </a:pPr>
+            <a:r>
+              <a:rPr lang="en-US" sz="1600" b="1" i="0" u="none" strike="noStrike" dirty="0">
+                <a:solidFill>
+                  <a:srgbClr val="000000"/>
+                </a:solidFill>
+                <a:effectLst/>
+                <a:latin typeface="Arial" panose="020B0604020202020204" pitchFamily="34" charset="0"/>
+                <a:cs typeface="Arial" panose="020B0604020202020204" pitchFamily="34" charset="0"/>
+              </a:rPr>
+              <a:t>Order Quantity:</a:t>
+            </a:r>
+            <a:r>
+              <a:rPr lang="en-US" sz="1600" b="0" i="0" u="none" strike="noStrike" dirty="0">
+                <a:solidFill>
+                  <a:srgbClr val="000000"/>
+                </a:solidFill>
+                <a:effectLst/>
+                <a:latin typeface="Arial" panose="020B0604020202020204" pitchFamily="34" charset="0"/>
+                <a:cs typeface="Arial" panose="020B0604020202020204" pitchFamily="34" charset="0"/>
+              </a:rPr>
+              <a:t> The quantity of the product ordered.</a:t>
+            </a:r>
+            <a:endParaRPr lang="en-US" sz="1600" b="1" i="0" u="none" strike="noStrike" dirty="0">
+              <a:solidFill>
+                <a:srgbClr val="000000"/>
+              </a:solidFill>
+              <a:effectLst/>
+              <a:latin typeface="Arial" panose="020B0604020202020204" pitchFamily="34" charset="0"/>
+              <a:cs typeface="Arial" panose="020B0604020202020204" pitchFamily="34" charset="0"/>
+            </a:endParaRPr>
+          </a:p>
+          <a:p>
+            <a:pPr fontAlgn="base">
+              <a:spcAft>
+                <a:spcPts val="0"/>
+              </a:spcAft>
+            </a:pPr>
+            <a:r>
+              <a:rPr lang="en-US" sz="1600" b="1" i="0" u="none" strike="noStrike" dirty="0">
+                <a:solidFill>
+                  <a:srgbClr val="000000"/>
+                </a:solidFill>
+                <a:effectLst/>
+                <a:latin typeface="Arial" panose="020B0604020202020204" pitchFamily="34" charset="0"/>
+                <a:cs typeface="Arial" panose="020B0604020202020204" pitchFamily="34" charset="0"/>
+              </a:rPr>
+              <a:t>Sale Price:</a:t>
+            </a:r>
+            <a:r>
+              <a:rPr lang="en-US" sz="1600" b="0" i="0" u="none" strike="noStrike" dirty="0">
+                <a:solidFill>
+                  <a:srgbClr val="000000"/>
+                </a:solidFill>
+                <a:effectLst/>
+                <a:latin typeface="Arial" panose="020B0604020202020204" pitchFamily="34" charset="0"/>
+                <a:cs typeface="Arial" panose="020B0604020202020204" pitchFamily="34" charset="0"/>
+              </a:rPr>
+              <a:t> The total sale price of the order.</a:t>
+            </a:r>
+            <a:endParaRPr lang="en-US" sz="1600" b="1" i="0" u="none" strike="noStrike" dirty="0">
+              <a:solidFill>
+                <a:srgbClr val="000000"/>
+              </a:solidFill>
+              <a:effectLst/>
+              <a:latin typeface="Arial" panose="020B0604020202020204" pitchFamily="34" charset="0"/>
+              <a:cs typeface="Arial" panose="020B0604020202020204" pitchFamily="34" charset="0"/>
+            </a:endParaRPr>
+          </a:p>
+          <a:p>
+            <a:pPr fontAlgn="base">
+              <a:spcAft>
+                <a:spcPts val="0"/>
+              </a:spcAft>
+            </a:pPr>
+            <a:r>
+              <a:rPr lang="en-US" sz="1600" b="1" i="0" u="none" strike="noStrike" dirty="0">
+                <a:solidFill>
+                  <a:srgbClr val="000000"/>
+                </a:solidFill>
+                <a:effectLst/>
+                <a:latin typeface="Arial" panose="020B0604020202020204" pitchFamily="34" charset="0"/>
+                <a:cs typeface="Arial" panose="020B0604020202020204" pitchFamily="34" charset="0"/>
+              </a:rPr>
+              <a:t>Status:</a:t>
+            </a:r>
+            <a:r>
+              <a:rPr lang="en-US" sz="1600" b="0" i="0" u="none" strike="noStrike" dirty="0">
+                <a:solidFill>
+                  <a:srgbClr val="000000"/>
+                </a:solidFill>
+                <a:effectLst/>
+                <a:latin typeface="Arial" panose="020B0604020202020204" pitchFamily="34" charset="0"/>
+                <a:cs typeface="Arial" panose="020B0604020202020204" pitchFamily="34" charset="0"/>
+              </a:rPr>
+              <a:t> Current status of the order (e.g., Delivered, Returned).</a:t>
+            </a:r>
+            <a:endParaRPr lang="en-US" sz="1600" b="1" i="0" u="none" strike="noStrike" dirty="0">
+              <a:solidFill>
+                <a:srgbClr val="000000"/>
+              </a:solidFill>
+              <a:effectLst/>
+              <a:latin typeface="Arial" panose="020B0604020202020204" pitchFamily="34" charset="0"/>
+              <a:cs typeface="Arial" panose="020B0604020202020204" pitchFamily="34" charset="0"/>
+            </a:endParaRPr>
+          </a:p>
+          <a:p>
+            <a:pPr fontAlgn="base">
+              <a:spcAft>
+                <a:spcPts val="0"/>
+              </a:spcAft>
+            </a:pPr>
+            <a:r>
+              <a:rPr lang="en-US" sz="1600" b="1" i="0" u="none" strike="noStrike" dirty="0">
+                <a:solidFill>
+                  <a:srgbClr val="000000"/>
+                </a:solidFill>
+                <a:effectLst/>
+                <a:latin typeface="Arial" panose="020B0604020202020204" pitchFamily="34" charset="0"/>
+                <a:cs typeface="Arial" panose="020B0604020202020204" pitchFamily="34" charset="0"/>
+              </a:rPr>
+              <a:t>Reason: </a:t>
+            </a:r>
+            <a:r>
+              <a:rPr lang="en-US" sz="1600" b="0" i="0" u="none" strike="noStrike" dirty="0">
+                <a:solidFill>
+                  <a:srgbClr val="000000"/>
+                </a:solidFill>
+                <a:effectLst/>
+                <a:latin typeface="Arial" panose="020B0604020202020204" pitchFamily="34" charset="0"/>
+                <a:cs typeface="Arial" panose="020B0604020202020204" pitchFamily="34" charset="0"/>
+              </a:rPr>
+              <a:t>The reason for the return or an empty field if delivered.</a:t>
+            </a:r>
+            <a:endParaRPr lang="en-US" sz="1600" b="1" i="0" u="none" strike="noStrike" dirty="0">
+              <a:solidFill>
+                <a:srgbClr val="000000"/>
+              </a:solidFill>
+              <a:effectLst/>
+              <a:latin typeface="Arial" panose="020B0604020202020204" pitchFamily="34" charset="0"/>
+              <a:cs typeface="Arial" panose="020B0604020202020204" pitchFamily="34" charset="0"/>
+            </a:endParaRPr>
+          </a:p>
+          <a:p>
+            <a:r>
+              <a:rPr lang="en-US" sz="1600" b="1" i="0" u="none" strike="noStrike" dirty="0">
+                <a:solidFill>
+                  <a:srgbClr val="000000"/>
+                </a:solidFill>
+                <a:effectLst/>
+                <a:latin typeface="Arial" panose="020B0604020202020204" pitchFamily="34" charset="0"/>
+                <a:cs typeface="Arial" panose="020B0604020202020204" pitchFamily="34" charset="0"/>
+              </a:rPr>
+              <a:t>Rating:</a:t>
+            </a:r>
+            <a:r>
+              <a:rPr lang="en-US" sz="1600" b="0" i="0" u="none" strike="noStrike" dirty="0">
+                <a:solidFill>
+                  <a:srgbClr val="000000"/>
+                </a:solidFill>
+                <a:effectLst/>
+                <a:latin typeface="Arial" panose="020B0604020202020204" pitchFamily="34" charset="0"/>
+                <a:cs typeface="Arial" panose="020B0604020202020204" pitchFamily="34" charset="0"/>
+              </a:rPr>
+              <a:t> Customer rating for the order on a scale (e.g., 1 to 5).</a:t>
+            </a:r>
+            <a:endParaRPr lang="en-IN" sz="1600" dirty="0">
+              <a:latin typeface="Arial" panose="020B0604020202020204" pitchFamily="34" charset="0"/>
+              <a:cs typeface="Arial" panose="020B0604020202020204" pitchFamily="34" charset="0"/>
+            </a:endParaRPr>
+          </a:p>
+        </p:txBody>
+      </p:sp>
+    </p:spTree>
+    <p:extLst>
+      <p:ext uri="{BB962C8B-B14F-4D97-AF65-F5344CB8AC3E}">
+        <p14:creationId xmlns:p14="http://schemas.microsoft.com/office/powerpoint/2010/main" val="801283838"/>
+      </p:ext>
+    </p:extLst>
+  </p:cSld>
+  <p:clrMapOvr>
+    <a:masterClrMapping/>
+  </p:clrMapOvr>
+</p:sld>
+</file>
+
+<file path=ppt/slides/slide5.xml><?xml version="1.0" encoding="utf-8"?>
+<p:sld xmlns:a="http://schemas.openxmlformats.org/drawingml/2006/main" xmlns:r="http://schemas.openxmlformats.org/officeDocument/2006/relationships" xmlns:p="http://schemas.openxmlformats.org/presentationml/2006/main">
+  <p:cSld>
+    <p:spTree>
+      <p:nvGrpSpPr>
+        <p:cNvPr id="1" name=""/>
+        <p:cNvGrpSpPr/>
+        <p:nvPr/>
+      </p:nvGrpSpPr>
+      <p:grpSpPr>
+        <a:xfrm>
+          <a:off x="0" y="0"/>
+          <a:ext cx="0" cy="0"/>
+          <a:chOff x="0" y="0"/>
+          <a:chExt cx="0" cy="0"/>
+        </a:xfrm>
+      </p:grpSpPr>
+      <p:sp>
+        <p:nvSpPr>
+          <p:cNvPr id="2" name="Title 1">
+            <a:extLst>
+              <a:ext uri="{FF2B5EF4-FFF2-40B4-BE49-F238E27FC236}">
                 <a16:creationId xmlns:a16="http://schemas.microsoft.com/office/drawing/2014/main" id="{629EB4BD-F99F-955D-3DC7-C6FE81D9DCA5}"/>
               </a:ext>
             </a:extLst>
@@ -6403,7 +7523,7 @@
 </p:sld>
 </file>
 
-<file path=ppt/slides/slide3.xml><?xml version="1.0" encoding="utf-8"?>
+<file path=ppt/slides/slide6.xml><?xml version="1.0" encoding="utf-8"?>
 <p:sld xmlns:a="http://schemas.openxmlformats.org/drawingml/2006/main" xmlns:r="http://schemas.openxmlformats.org/officeDocument/2006/relationships" xmlns:p="http://schemas.openxmlformats.org/presentationml/2006/main">
   <p:cSld>
     <p:spTree>
@@ -6698,1126 +7818,6 @@
     <p:extLst>
       <p:ext uri="{BB962C8B-B14F-4D97-AF65-F5344CB8AC3E}">
         <p14:creationId xmlns:p14="http://schemas.microsoft.com/office/powerpoint/2010/main" val="1822065332"/>
-      </p:ext>
-    </p:extLst>
-  </p:cSld>
-  <p:clrMapOvr>
-    <a:masterClrMapping/>
-  </p:clrMapOvr>
-</p:sld>
-</file>
-
-<file path=ppt/slides/slide4.xml><?xml version="1.0" encoding="utf-8"?>
-<p:sld xmlns:a="http://schemas.openxmlformats.org/drawingml/2006/main" xmlns:r="http://schemas.openxmlformats.org/officeDocument/2006/relationships" xmlns:p="http://schemas.openxmlformats.org/presentationml/2006/main">
-  <p:cSld>
-    <p:spTree>
-      <p:nvGrpSpPr>
-        <p:cNvPr id="1" name=""/>
-        <p:cNvGrpSpPr/>
-        <p:nvPr/>
-      </p:nvGrpSpPr>
-      <p:grpSpPr>
-        <a:xfrm>
-          <a:off x="0" y="0"/>
-          <a:ext cx="0" cy="0"/>
-          <a:chOff x="0" y="0"/>
-          <a:chExt cx="0" cy="0"/>
-        </a:xfrm>
-      </p:grpSpPr>
-      <p:sp>
-        <p:nvSpPr>
-          <p:cNvPr id="2" name="Title 1">
-            <a:extLst>
-              <a:ext uri="{FF2B5EF4-FFF2-40B4-BE49-F238E27FC236}">
-                <a16:creationId xmlns:a16="http://schemas.microsoft.com/office/drawing/2014/main" id="{B8DD95B2-1B91-4A7E-2D4B-10D1AC6D3AD4}"/>
-              </a:ext>
-            </a:extLst>
-          </p:cNvPr>
-          <p:cNvSpPr>
-            <a:spLocks noGrp="1"/>
-          </p:cNvSpPr>
-          <p:nvPr>
-            <p:ph type="title"/>
-          </p:nvPr>
-        </p:nvSpPr>
-        <p:spPr>
-          <a:xfrm>
-            <a:off x="1066800" y="438880"/>
-            <a:ext cx="10058400" cy="1100051"/>
-          </a:xfrm>
-        </p:spPr>
-        <p:txBody>
-          <a:bodyPr>
-            <a:normAutofit/>
-          </a:bodyPr>
-          <a:lstStyle/>
-          <a:p>
-            <a:pPr algn="ctr"/>
-            <a:r>
-              <a:rPr lang="en-US" sz="3600" b="1" dirty="0">
-                <a:solidFill>
-                  <a:schemeClr val="accent1">
-                    <a:lumMod val="75000"/>
-                  </a:schemeClr>
-                </a:solidFill>
-                <a:latin typeface="Arial" panose="020B0604020202020204" pitchFamily="34" charset="0"/>
-                <a:cs typeface="Arial" panose="020B0604020202020204" pitchFamily="34" charset="0"/>
-              </a:rPr>
-              <a:t>Problem statement of the Project</a:t>
-            </a:r>
-            <a:endParaRPr lang="en-IN" sz="3600" b="1" dirty="0">
-              <a:solidFill>
-                <a:schemeClr val="accent1">
-                  <a:lumMod val="75000"/>
-                </a:schemeClr>
-              </a:solidFill>
-              <a:latin typeface="Arial" panose="020B0604020202020204" pitchFamily="34" charset="0"/>
-              <a:cs typeface="Arial" panose="020B0604020202020204" pitchFamily="34" charset="0"/>
-            </a:endParaRPr>
-          </a:p>
-        </p:txBody>
-      </p:sp>
-      <p:sp>
-        <p:nvSpPr>
-          <p:cNvPr id="3" name="Content Placeholder 2">
-            <a:extLst>
-              <a:ext uri="{FF2B5EF4-FFF2-40B4-BE49-F238E27FC236}">
-                <a16:creationId xmlns:a16="http://schemas.microsoft.com/office/drawing/2014/main" id="{16D8D823-44DE-7B9C-2A03-EA50E1501694}"/>
-              </a:ext>
-            </a:extLst>
-          </p:cNvPr>
-          <p:cNvSpPr>
-            <a:spLocks noGrp="1"/>
-          </p:cNvSpPr>
-          <p:nvPr>
-            <p:ph idx="1"/>
-          </p:nvPr>
-        </p:nvSpPr>
-        <p:spPr>
-          <a:xfrm>
-            <a:off x="1097280" y="1845734"/>
-            <a:ext cx="6910647" cy="4023360"/>
-          </a:xfrm>
-        </p:spPr>
-        <p:txBody>
-          <a:bodyPr anchor="ctr">
-            <a:normAutofit/>
-          </a:bodyPr>
-          <a:lstStyle/>
-          <a:p>
-            <a:r>
-              <a:rPr lang="en-US" sz="1800" b="1" i="0" u="none" strike="noStrike" dirty="0">
-                <a:solidFill>
-                  <a:srgbClr val="000000"/>
-                </a:solidFill>
-                <a:effectLst/>
-                <a:latin typeface="Arial" panose="020B0604020202020204" pitchFamily="34" charset="0"/>
-                <a:cs typeface="Arial" panose="020B0604020202020204" pitchFamily="34" charset="0"/>
-              </a:rPr>
-              <a:t>Amazon, a company currently performing well in E-commerce sector. The stakeholders wish to maintain this level of performance and seek improvement. For this purpose, they want to devise new strategies. You are part of a team exploring new ways to benefit customers, such as offering more discounts and Prime membership perks. Could you suggest additional methods to identify and reward customers and enhance their shopping experience.</a:t>
-            </a:r>
-            <a:endParaRPr lang="en-IN" sz="1800" b="1" dirty="0">
-              <a:latin typeface="Arial" panose="020B0604020202020204" pitchFamily="34" charset="0"/>
-              <a:cs typeface="Arial" panose="020B0604020202020204" pitchFamily="34" charset="0"/>
-            </a:endParaRPr>
-          </a:p>
-        </p:txBody>
-      </p:sp>
-      <p:pic>
-        <p:nvPicPr>
-          <p:cNvPr id="4" name="Picture 3">
-            <a:extLst>
-              <a:ext uri="{FF2B5EF4-FFF2-40B4-BE49-F238E27FC236}">
-                <a16:creationId xmlns:a16="http://schemas.microsoft.com/office/drawing/2014/main" id="{49F80194-B8F6-D3E0-9B30-CE8FC170BEE3}"/>
-              </a:ext>
-            </a:extLst>
-          </p:cNvPr>
-          <p:cNvPicPr>
-            <a:picLocks noChangeAspect="1"/>
-          </p:cNvPicPr>
-          <p:nvPr/>
-        </p:nvPicPr>
-        <p:blipFill>
-          <a:blip r:embed="rId2"/>
-          <a:stretch>
-            <a:fillRect/>
-          </a:stretch>
-        </p:blipFill>
-        <p:spPr>
-          <a:xfrm>
-            <a:off x="8132618" y="1845734"/>
-            <a:ext cx="2962102" cy="4236411"/>
-          </a:xfrm>
-          <a:prstGeom prst="rect">
-            <a:avLst/>
-          </a:prstGeom>
-        </p:spPr>
-      </p:pic>
-    </p:spTree>
-    <p:extLst>
-      <p:ext uri="{BB962C8B-B14F-4D97-AF65-F5344CB8AC3E}">
-        <p14:creationId xmlns:p14="http://schemas.microsoft.com/office/powerpoint/2010/main" val="377303760"/>
-      </p:ext>
-    </p:extLst>
-  </p:cSld>
-  <p:clrMapOvr>
-    <a:masterClrMapping/>
-  </p:clrMapOvr>
-</p:sld>
-</file>
-
-<file path=ppt/slides/slide5.xml><?xml version="1.0" encoding="utf-8"?>
-<p:sld xmlns:a="http://schemas.openxmlformats.org/drawingml/2006/main" xmlns:r="http://schemas.openxmlformats.org/officeDocument/2006/relationships" xmlns:p="http://schemas.openxmlformats.org/presentationml/2006/main">
-  <p:cSld>
-    <p:spTree>
-      <p:nvGrpSpPr>
-        <p:cNvPr id="1" name=""/>
-        <p:cNvGrpSpPr/>
-        <p:nvPr/>
-      </p:nvGrpSpPr>
-      <p:grpSpPr>
-        <a:xfrm>
-          <a:off x="0" y="0"/>
-          <a:ext cx="0" cy="0"/>
-          <a:chOff x="0" y="0"/>
-          <a:chExt cx="0" cy="0"/>
-        </a:xfrm>
-      </p:grpSpPr>
-      <p:sp>
-        <p:nvSpPr>
-          <p:cNvPr id="2" name="Title 1">
-            <a:extLst>
-              <a:ext uri="{FF2B5EF4-FFF2-40B4-BE49-F238E27FC236}">
-                <a16:creationId xmlns:a16="http://schemas.microsoft.com/office/drawing/2014/main" id="{0614C04C-621A-0356-6AB6-CF494F18201D}"/>
-              </a:ext>
-            </a:extLst>
-          </p:cNvPr>
-          <p:cNvSpPr>
-            <a:spLocks noGrp="1"/>
-          </p:cNvSpPr>
-          <p:nvPr>
-            <p:ph type="title"/>
-          </p:nvPr>
-        </p:nvSpPr>
-        <p:spPr>
-          <a:xfrm>
-            <a:off x="1066800" y="452735"/>
-            <a:ext cx="10058400" cy="1072342"/>
-          </a:xfrm>
-        </p:spPr>
-        <p:txBody>
-          <a:bodyPr>
-            <a:normAutofit/>
-          </a:bodyPr>
-          <a:lstStyle/>
-          <a:p>
-            <a:pPr algn="ctr"/>
-            <a:r>
-              <a:rPr lang="en-US" sz="3600" b="1" dirty="0">
-                <a:solidFill>
-                  <a:schemeClr val="accent1">
-                    <a:lumMod val="75000"/>
-                  </a:schemeClr>
-                </a:solidFill>
-                <a:latin typeface="Arial" panose="020B0604020202020204" pitchFamily="34" charset="0"/>
-                <a:cs typeface="Arial" panose="020B0604020202020204" pitchFamily="34" charset="0"/>
-              </a:rPr>
-              <a:t>Dataset Overview</a:t>
-            </a:r>
-            <a:endParaRPr lang="en-IN" sz="3600" b="1" dirty="0">
-              <a:solidFill>
-                <a:schemeClr val="accent1">
-                  <a:lumMod val="75000"/>
-                </a:schemeClr>
-              </a:solidFill>
-              <a:latin typeface="Arial" panose="020B0604020202020204" pitchFamily="34" charset="0"/>
-              <a:cs typeface="Arial" panose="020B0604020202020204" pitchFamily="34" charset="0"/>
-            </a:endParaRPr>
-          </a:p>
-        </p:txBody>
-      </p:sp>
-      <p:sp>
-        <p:nvSpPr>
-          <p:cNvPr id="3" name="Content Placeholder 2">
-            <a:extLst>
-              <a:ext uri="{FF2B5EF4-FFF2-40B4-BE49-F238E27FC236}">
-                <a16:creationId xmlns:a16="http://schemas.microsoft.com/office/drawing/2014/main" id="{15ACB221-0B50-43C8-509A-B30BBB84EA52}"/>
-              </a:ext>
-            </a:extLst>
-          </p:cNvPr>
-          <p:cNvSpPr>
-            <a:spLocks noGrp="1"/>
-          </p:cNvSpPr>
-          <p:nvPr>
-            <p:ph idx="1"/>
-          </p:nvPr>
-        </p:nvSpPr>
-        <p:spPr>
-          <a:xfrm>
-            <a:off x="1097279" y="2022764"/>
-            <a:ext cx="10058399" cy="4197926"/>
-          </a:xfrm>
-        </p:spPr>
-        <p:txBody>
-          <a:bodyPr>
-            <a:normAutofit/>
-          </a:bodyPr>
-          <a:lstStyle/>
-          <a:p>
-            <a:pPr fontAlgn="base">
-              <a:spcAft>
-                <a:spcPts val="0"/>
-              </a:spcAft>
-            </a:pPr>
-            <a:r>
-              <a:rPr lang="en-US" sz="1600" b="1" i="0" u="none" strike="noStrike" dirty="0" err="1">
-                <a:solidFill>
-                  <a:srgbClr val="000000"/>
-                </a:solidFill>
-                <a:effectLst/>
-                <a:latin typeface="Arial" panose="020B0604020202020204" pitchFamily="34" charset="0"/>
-                <a:cs typeface="Arial" panose="020B0604020202020204" pitchFamily="34" charset="0"/>
-              </a:rPr>
-              <a:t>OrderDate</a:t>
-            </a:r>
-            <a:r>
-              <a:rPr lang="en-US" sz="1600" b="1" i="0" u="none" strike="noStrike" dirty="0">
-                <a:solidFill>
-                  <a:srgbClr val="000000"/>
-                </a:solidFill>
-                <a:effectLst/>
-                <a:latin typeface="Arial" panose="020B0604020202020204" pitchFamily="34" charset="0"/>
-                <a:cs typeface="Arial" panose="020B0604020202020204" pitchFamily="34" charset="0"/>
-              </a:rPr>
-              <a:t>:</a:t>
-            </a:r>
-            <a:r>
-              <a:rPr lang="en-US" sz="1600" b="0" i="0" u="none" strike="noStrike" dirty="0">
-                <a:solidFill>
-                  <a:srgbClr val="000000"/>
-                </a:solidFill>
-                <a:effectLst/>
-                <a:latin typeface="Arial" panose="020B0604020202020204" pitchFamily="34" charset="0"/>
-                <a:cs typeface="Arial" panose="020B0604020202020204" pitchFamily="34" charset="0"/>
-              </a:rPr>
-              <a:t> The date when the order was placed.</a:t>
-            </a:r>
-            <a:endParaRPr lang="en-US" sz="1600" b="1" i="0" u="none" strike="noStrike" dirty="0">
-              <a:solidFill>
-                <a:srgbClr val="000000"/>
-              </a:solidFill>
-              <a:effectLst/>
-              <a:latin typeface="Arial" panose="020B0604020202020204" pitchFamily="34" charset="0"/>
-              <a:cs typeface="Arial" panose="020B0604020202020204" pitchFamily="34" charset="0"/>
-            </a:endParaRPr>
-          </a:p>
-          <a:p>
-            <a:pPr fontAlgn="base">
-              <a:spcAft>
-                <a:spcPts val="0"/>
-              </a:spcAft>
-            </a:pPr>
-            <a:r>
-              <a:rPr lang="en-US" sz="1600" b="1" i="0" u="none" strike="noStrike" dirty="0" err="1">
-                <a:solidFill>
-                  <a:srgbClr val="000000"/>
-                </a:solidFill>
-                <a:effectLst/>
-                <a:latin typeface="Arial" panose="020B0604020202020204" pitchFamily="34" charset="0"/>
-                <a:cs typeface="Arial" panose="020B0604020202020204" pitchFamily="34" charset="0"/>
-              </a:rPr>
-              <a:t>OrderID</a:t>
-            </a:r>
-            <a:r>
-              <a:rPr lang="en-US" sz="1600" b="1" i="0" u="none" strike="noStrike" dirty="0">
-                <a:solidFill>
-                  <a:srgbClr val="000000"/>
-                </a:solidFill>
-                <a:effectLst/>
-                <a:latin typeface="Arial" panose="020B0604020202020204" pitchFamily="34" charset="0"/>
-                <a:cs typeface="Arial" panose="020B0604020202020204" pitchFamily="34" charset="0"/>
-              </a:rPr>
-              <a:t>:</a:t>
-            </a:r>
-            <a:r>
-              <a:rPr lang="en-US" sz="1600" b="0" i="0" u="none" strike="noStrike" dirty="0">
-                <a:solidFill>
-                  <a:srgbClr val="000000"/>
-                </a:solidFill>
-                <a:effectLst/>
-                <a:latin typeface="Arial" panose="020B0604020202020204" pitchFamily="34" charset="0"/>
-                <a:cs typeface="Arial" panose="020B0604020202020204" pitchFamily="34" charset="0"/>
-              </a:rPr>
-              <a:t> A unique identifier for each order.</a:t>
-            </a:r>
-            <a:endParaRPr lang="en-US" sz="1600" b="1" i="0" u="none" strike="noStrike" dirty="0">
-              <a:solidFill>
-                <a:srgbClr val="000000"/>
-              </a:solidFill>
-              <a:effectLst/>
-              <a:latin typeface="Arial" panose="020B0604020202020204" pitchFamily="34" charset="0"/>
-              <a:cs typeface="Arial" panose="020B0604020202020204" pitchFamily="34" charset="0"/>
-            </a:endParaRPr>
-          </a:p>
-          <a:p>
-            <a:pPr fontAlgn="base">
-              <a:spcAft>
-                <a:spcPts val="0"/>
-              </a:spcAft>
-            </a:pPr>
-            <a:r>
-              <a:rPr lang="en-US" sz="1600" b="1" i="0" u="none" strike="noStrike" dirty="0">
-                <a:solidFill>
-                  <a:srgbClr val="000000"/>
-                </a:solidFill>
-                <a:effectLst/>
-                <a:latin typeface="Arial" panose="020B0604020202020204" pitchFamily="34" charset="0"/>
-                <a:cs typeface="Arial" panose="020B0604020202020204" pitchFamily="34" charset="0"/>
-              </a:rPr>
-              <a:t>Delivery Date:</a:t>
-            </a:r>
-            <a:r>
-              <a:rPr lang="en-US" sz="1600" b="0" i="0" u="none" strike="noStrike" dirty="0">
-                <a:solidFill>
-                  <a:srgbClr val="000000"/>
-                </a:solidFill>
-                <a:effectLst/>
-                <a:latin typeface="Arial" panose="020B0604020202020204" pitchFamily="34" charset="0"/>
-                <a:cs typeface="Arial" panose="020B0604020202020204" pitchFamily="34" charset="0"/>
-              </a:rPr>
-              <a:t> The date when the order is scheduled to be delivered.</a:t>
-            </a:r>
-            <a:endParaRPr lang="en-US" sz="1600" b="1" i="0" u="none" strike="noStrike" dirty="0">
-              <a:solidFill>
-                <a:srgbClr val="000000"/>
-              </a:solidFill>
-              <a:effectLst/>
-              <a:latin typeface="Arial" panose="020B0604020202020204" pitchFamily="34" charset="0"/>
-              <a:cs typeface="Arial" panose="020B0604020202020204" pitchFamily="34" charset="0"/>
-            </a:endParaRPr>
-          </a:p>
-          <a:p>
-            <a:pPr fontAlgn="base">
-              <a:spcAft>
-                <a:spcPts val="0"/>
-              </a:spcAft>
-            </a:pPr>
-            <a:r>
-              <a:rPr lang="en-US" sz="1600" b="1" i="0" u="none" strike="noStrike" dirty="0" err="1">
-                <a:solidFill>
-                  <a:srgbClr val="000000"/>
-                </a:solidFill>
-                <a:effectLst/>
-                <a:latin typeface="Arial" panose="020B0604020202020204" pitchFamily="34" charset="0"/>
-                <a:cs typeface="Arial" panose="020B0604020202020204" pitchFamily="34" charset="0"/>
-              </a:rPr>
-              <a:t>CustomerID</a:t>
-            </a:r>
-            <a:r>
-              <a:rPr lang="en-US" sz="1600" b="1" i="0" u="none" strike="noStrike" dirty="0">
-                <a:solidFill>
-                  <a:srgbClr val="000000"/>
-                </a:solidFill>
-                <a:effectLst/>
-                <a:latin typeface="Arial" panose="020B0604020202020204" pitchFamily="34" charset="0"/>
-                <a:cs typeface="Arial" panose="020B0604020202020204" pitchFamily="34" charset="0"/>
-              </a:rPr>
-              <a:t>: </a:t>
-            </a:r>
-            <a:r>
-              <a:rPr lang="en-US" sz="1600" b="0" i="0" u="none" strike="noStrike" dirty="0">
-                <a:solidFill>
-                  <a:srgbClr val="000000"/>
-                </a:solidFill>
-                <a:effectLst/>
-                <a:latin typeface="Arial" panose="020B0604020202020204" pitchFamily="34" charset="0"/>
-                <a:cs typeface="Arial" panose="020B0604020202020204" pitchFamily="34" charset="0"/>
-              </a:rPr>
-              <a:t>A unique identifier for each customer.</a:t>
-            </a:r>
-            <a:endParaRPr lang="en-US" sz="1600" b="1" i="0" u="none" strike="noStrike" dirty="0">
-              <a:solidFill>
-                <a:srgbClr val="000000"/>
-              </a:solidFill>
-              <a:effectLst/>
-              <a:latin typeface="Arial" panose="020B0604020202020204" pitchFamily="34" charset="0"/>
-              <a:cs typeface="Arial" panose="020B0604020202020204" pitchFamily="34" charset="0"/>
-            </a:endParaRPr>
-          </a:p>
-          <a:p>
-            <a:pPr fontAlgn="base">
-              <a:spcAft>
-                <a:spcPts val="0"/>
-              </a:spcAft>
-            </a:pPr>
-            <a:r>
-              <a:rPr lang="en-US" sz="1600" b="1" i="0" u="none" strike="noStrike" dirty="0">
-                <a:solidFill>
-                  <a:srgbClr val="000000"/>
-                </a:solidFill>
-                <a:effectLst/>
-                <a:latin typeface="Arial" panose="020B0604020202020204" pitchFamily="34" charset="0"/>
-                <a:cs typeface="Arial" panose="020B0604020202020204" pitchFamily="34" charset="0"/>
-              </a:rPr>
-              <a:t>Customer Age:</a:t>
-            </a:r>
-            <a:r>
-              <a:rPr lang="en-US" sz="1600" b="0" i="0" u="none" strike="noStrike" dirty="0">
-                <a:solidFill>
-                  <a:srgbClr val="000000"/>
-                </a:solidFill>
-                <a:effectLst/>
-                <a:latin typeface="Arial" panose="020B0604020202020204" pitchFamily="34" charset="0"/>
-                <a:cs typeface="Arial" panose="020B0604020202020204" pitchFamily="34" charset="0"/>
-              </a:rPr>
-              <a:t> The age of the customer.</a:t>
-            </a:r>
-            <a:endParaRPr lang="en-US" sz="1600" b="1" i="0" u="none" strike="noStrike" dirty="0">
-              <a:solidFill>
-                <a:srgbClr val="000000"/>
-              </a:solidFill>
-              <a:effectLst/>
-              <a:latin typeface="Arial" panose="020B0604020202020204" pitchFamily="34" charset="0"/>
-              <a:cs typeface="Arial" panose="020B0604020202020204" pitchFamily="34" charset="0"/>
-            </a:endParaRPr>
-          </a:p>
-          <a:p>
-            <a:pPr fontAlgn="base">
-              <a:spcAft>
-                <a:spcPts val="0"/>
-              </a:spcAft>
-            </a:pPr>
-            <a:r>
-              <a:rPr lang="en-US" sz="1600" b="1" i="0" u="none" strike="noStrike" dirty="0">
-                <a:solidFill>
-                  <a:srgbClr val="000000"/>
-                </a:solidFill>
-                <a:effectLst/>
-                <a:latin typeface="Arial" panose="020B0604020202020204" pitchFamily="34" charset="0"/>
-                <a:cs typeface="Arial" panose="020B0604020202020204" pitchFamily="34" charset="0"/>
-              </a:rPr>
-              <a:t>Customer Gender:</a:t>
-            </a:r>
-            <a:r>
-              <a:rPr lang="en-US" sz="1600" b="0" i="0" u="none" strike="noStrike" dirty="0">
-                <a:solidFill>
-                  <a:srgbClr val="000000"/>
-                </a:solidFill>
-                <a:effectLst/>
-                <a:latin typeface="Arial" panose="020B0604020202020204" pitchFamily="34" charset="0"/>
-                <a:cs typeface="Arial" panose="020B0604020202020204" pitchFamily="34" charset="0"/>
-              </a:rPr>
-              <a:t> The gender of the customer (M for male, F for female).</a:t>
-            </a:r>
-            <a:endParaRPr lang="en-US" sz="1600" b="1" i="0" u="none" strike="noStrike" dirty="0">
-              <a:solidFill>
-                <a:srgbClr val="000000"/>
-              </a:solidFill>
-              <a:effectLst/>
-              <a:latin typeface="Arial" panose="020B0604020202020204" pitchFamily="34" charset="0"/>
-              <a:cs typeface="Arial" panose="020B0604020202020204" pitchFamily="34" charset="0"/>
-            </a:endParaRPr>
-          </a:p>
-          <a:p>
-            <a:pPr fontAlgn="base">
-              <a:spcAft>
-                <a:spcPts val="0"/>
-              </a:spcAft>
-            </a:pPr>
-            <a:r>
-              <a:rPr lang="en-US" sz="1600" b="1" i="0" u="none" strike="noStrike" dirty="0">
-                <a:solidFill>
-                  <a:srgbClr val="000000"/>
-                </a:solidFill>
-                <a:effectLst/>
-                <a:latin typeface="Arial" panose="020B0604020202020204" pitchFamily="34" charset="0"/>
-                <a:cs typeface="Arial" panose="020B0604020202020204" pitchFamily="34" charset="0"/>
-              </a:rPr>
-              <a:t>Location:</a:t>
-            </a:r>
-            <a:r>
-              <a:rPr lang="en-US" sz="1600" b="0" i="0" u="none" strike="noStrike" dirty="0">
-                <a:solidFill>
-                  <a:srgbClr val="000000"/>
-                </a:solidFill>
-                <a:effectLst/>
-                <a:latin typeface="Arial" panose="020B0604020202020204" pitchFamily="34" charset="0"/>
-                <a:cs typeface="Arial" panose="020B0604020202020204" pitchFamily="34" charset="0"/>
-              </a:rPr>
-              <a:t> The geographical area where the customer is located.</a:t>
-            </a:r>
-            <a:endParaRPr lang="en-US" sz="1600" b="1" i="0" u="none" strike="noStrike" dirty="0">
-              <a:solidFill>
-                <a:srgbClr val="000000"/>
-              </a:solidFill>
-              <a:effectLst/>
-              <a:latin typeface="Arial" panose="020B0604020202020204" pitchFamily="34" charset="0"/>
-              <a:cs typeface="Arial" panose="020B0604020202020204" pitchFamily="34" charset="0"/>
-            </a:endParaRPr>
-          </a:p>
-          <a:p>
-            <a:pPr fontAlgn="base">
-              <a:spcAft>
-                <a:spcPts val="0"/>
-              </a:spcAft>
-            </a:pPr>
-            <a:r>
-              <a:rPr lang="en-US" sz="1600" b="1" i="0" u="none" strike="noStrike" dirty="0">
-                <a:solidFill>
-                  <a:srgbClr val="000000"/>
-                </a:solidFill>
-                <a:effectLst/>
-                <a:latin typeface="Arial" panose="020B0604020202020204" pitchFamily="34" charset="0"/>
-                <a:cs typeface="Arial" panose="020B0604020202020204" pitchFamily="34" charset="0"/>
-              </a:rPr>
-              <a:t>Zone: </a:t>
-            </a:r>
-            <a:r>
-              <a:rPr lang="en-US" sz="1600" b="0" i="0" u="none" strike="noStrike" dirty="0">
-                <a:solidFill>
-                  <a:srgbClr val="000000"/>
-                </a:solidFill>
-                <a:effectLst/>
-                <a:latin typeface="Arial" panose="020B0604020202020204" pitchFamily="34" charset="0"/>
-                <a:cs typeface="Arial" panose="020B0604020202020204" pitchFamily="34" charset="0"/>
-              </a:rPr>
-              <a:t>Specific zone within the location for delivery purposes.</a:t>
-            </a:r>
-            <a:endParaRPr lang="en-US" sz="1600" b="1" i="0" u="none" strike="noStrike" dirty="0">
-              <a:solidFill>
-                <a:srgbClr val="000000"/>
-              </a:solidFill>
-              <a:effectLst/>
-              <a:latin typeface="Arial" panose="020B0604020202020204" pitchFamily="34" charset="0"/>
-              <a:cs typeface="Arial" panose="020B0604020202020204" pitchFamily="34" charset="0"/>
-            </a:endParaRPr>
-          </a:p>
-          <a:p>
-            <a:pPr fontAlgn="base">
-              <a:spcAft>
-                <a:spcPts val="0"/>
-              </a:spcAft>
-            </a:pPr>
-            <a:r>
-              <a:rPr lang="en-US" sz="1600" b="1" i="0" u="none" strike="noStrike" dirty="0">
-                <a:solidFill>
-                  <a:srgbClr val="000000"/>
-                </a:solidFill>
-                <a:effectLst/>
-                <a:latin typeface="Arial" panose="020B0604020202020204" pitchFamily="34" charset="0"/>
-                <a:cs typeface="Arial" panose="020B0604020202020204" pitchFamily="34" charset="0"/>
-              </a:rPr>
-              <a:t>Delivery Type:</a:t>
-            </a:r>
-            <a:r>
-              <a:rPr lang="en-US" sz="1600" b="0" i="0" u="none" strike="noStrike" dirty="0">
-                <a:solidFill>
-                  <a:srgbClr val="000000"/>
-                </a:solidFill>
-                <a:effectLst/>
-                <a:latin typeface="Arial" panose="020B0604020202020204" pitchFamily="34" charset="0"/>
-                <a:cs typeface="Arial" panose="020B0604020202020204" pitchFamily="34" charset="0"/>
-              </a:rPr>
-              <a:t> The method by which the order is delivered (e.g., Express, Standard).</a:t>
-            </a:r>
-            <a:endParaRPr lang="en-US" sz="1600" b="1" i="0" u="none" strike="noStrike" dirty="0">
-              <a:solidFill>
-                <a:srgbClr val="000000"/>
-              </a:solidFill>
-              <a:effectLst/>
-              <a:latin typeface="Arial" panose="020B0604020202020204" pitchFamily="34" charset="0"/>
-              <a:cs typeface="Arial" panose="020B0604020202020204" pitchFamily="34" charset="0"/>
-            </a:endParaRPr>
-          </a:p>
-          <a:p>
-            <a:r>
-              <a:rPr lang="en-US" sz="1600" b="1" i="0" u="none" strike="noStrike" dirty="0">
-                <a:solidFill>
-                  <a:srgbClr val="000000"/>
-                </a:solidFill>
-                <a:effectLst/>
-                <a:latin typeface="Arial" panose="020B0604020202020204" pitchFamily="34" charset="0"/>
-                <a:cs typeface="Arial" panose="020B0604020202020204" pitchFamily="34" charset="0"/>
-              </a:rPr>
-              <a:t>Product Category:</a:t>
-            </a:r>
-            <a:r>
-              <a:rPr lang="en-US" sz="1600" b="0" i="0" u="none" strike="noStrike" dirty="0">
-                <a:solidFill>
-                  <a:srgbClr val="000000"/>
-                </a:solidFill>
-                <a:effectLst/>
-                <a:latin typeface="Arial" panose="020B0604020202020204" pitchFamily="34" charset="0"/>
-                <a:cs typeface="Arial" panose="020B0604020202020204" pitchFamily="34" charset="0"/>
-              </a:rPr>
-              <a:t> The broad category to which the product belong</a:t>
-            </a:r>
-          </a:p>
-          <a:p>
-            <a:r>
-              <a:rPr lang="en-US" sz="1700" dirty="0">
-                <a:solidFill>
-                  <a:srgbClr val="000000"/>
-                </a:solidFill>
-                <a:latin typeface="Arial" panose="020B0604020202020204" pitchFamily="34" charset="0"/>
-                <a:cs typeface="Arial" panose="020B0604020202020204" pitchFamily="34" charset="0"/>
-              </a:rPr>
-              <a:t>                                                                                                                                                     </a:t>
-            </a:r>
-          </a:p>
-        </p:txBody>
-      </p:sp>
-    </p:spTree>
-    <p:extLst>
-      <p:ext uri="{BB962C8B-B14F-4D97-AF65-F5344CB8AC3E}">
-        <p14:creationId xmlns:p14="http://schemas.microsoft.com/office/powerpoint/2010/main" val="615012478"/>
-      </p:ext>
-    </p:extLst>
-  </p:cSld>
-  <p:clrMapOvr>
-    <a:masterClrMapping/>
-  </p:clrMapOvr>
-</p:sld>
-</file>
-
-<file path=ppt/slides/slide6.xml><?xml version="1.0" encoding="utf-8"?>
-<p:sld xmlns:a="http://schemas.openxmlformats.org/drawingml/2006/main" xmlns:r="http://schemas.openxmlformats.org/officeDocument/2006/relationships" xmlns:p="http://schemas.openxmlformats.org/presentationml/2006/main">
-  <p:cSld>
-    <p:spTree>
-      <p:nvGrpSpPr>
-        <p:cNvPr id="1" name=""/>
-        <p:cNvGrpSpPr/>
-        <p:nvPr/>
-      </p:nvGrpSpPr>
-      <p:grpSpPr>
-        <a:xfrm>
-          <a:off x="0" y="0"/>
-          <a:ext cx="0" cy="0"/>
-          <a:chOff x="0" y="0"/>
-          <a:chExt cx="0" cy="0"/>
-        </a:xfrm>
-      </p:grpSpPr>
-      <p:sp>
-        <p:nvSpPr>
-          <p:cNvPr id="2" name="Title 1">
-            <a:extLst>
-              <a:ext uri="{FF2B5EF4-FFF2-40B4-BE49-F238E27FC236}">
-                <a16:creationId xmlns:a16="http://schemas.microsoft.com/office/drawing/2014/main" id="{C3DF4336-9D7A-E072-5994-384618979231}"/>
-              </a:ext>
-            </a:extLst>
-          </p:cNvPr>
-          <p:cNvSpPr>
-            <a:spLocks noGrp="1"/>
-          </p:cNvSpPr>
-          <p:nvPr>
-            <p:ph type="title"/>
-          </p:nvPr>
-        </p:nvSpPr>
-        <p:spPr>
-          <a:xfrm>
-            <a:off x="1097280" y="542790"/>
-            <a:ext cx="10058400" cy="892233"/>
-          </a:xfrm>
-        </p:spPr>
-        <p:txBody>
-          <a:bodyPr>
-            <a:normAutofit/>
-          </a:bodyPr>
-          <a:lstStyle/>
-          <a:p>
-            <a:pPr algn="ctr"/>
-            <a:r>
-              <a:rPr lang="en-US" sz="3600" b="1" dirty="0">
-                <a:solidFill>
-                  <a:schemeClr val="accent1">
-                    <a:lumMod val="75000"/>
-                  </a:schemeClr>
-                </a:solidFill>
-                <a:latin typeface="Arial" panose="020B0604020202020204" pitchFamily="34" charset="0"/>
-                <a:cs typeface="Arial" panose="020B0604020202020204" pitchFamily="34" charset="0"/>
-              </a:rPr>
-              <a:t>Dataset Overview</a:t>
-            </a:r>
-            <a:endParaRPr lang="en-IN" sz="3600" b="1" dirty="0">
-              <a:solidFill>
-                <a:schemeClr val="accent1">
-                  <a:lumMod val="75000"/>
-                </a:schemeClr>
-              </a:solidFill>
-              <a:latin typeface="Arial" panose="020B0604020202020204" pitchFamily="34" charset="0"/>
-              <a:cs typeface="Arial" panose="020B0604020202020204" pitchFamily="34" charset="0"/>
-            </a:endParaRPr>
-          </a:p>
-        </p:txBody>
-      </p:sp>
-      <p:sp>
-        <p:nvSpPr>
-          <p:cNvPr id="3" name="Content Placeholder 2">
-            <a:extLst>
-              <a:ext uri="{FF2B5EF4-FFF2-40B4-BE49-F238E27FC236}">
-                <a16:creationId xmlns:a16="http://schemas.microsoft.com/office/drawing/2014/main" id="{8DBA5C4F-DC4B-548F-496C-CA7AE6A8619D}"/>
-              </a:ext>
-            </a:extLst>
-          </p:cNvPr>
-          <p:cNvSpPr>
-            <a:spLocks noGrp="1"/>
-          </p:cNvSpPr>
-          <p:nvPr>
-            <p:ph idx="1"/>
-          </p:nvPr>
-        </p:nvSpPr>
-        <p:spPr>
-          <a:xfrm>
-            <a:off x="1097280" y="2050472"/>
-            <a:ext cx="10058400" cy="3818621"/>
-          </a:xfrm>
-        </p:spPr>
-        <p:txBody>
-          <a:bodyPr>
-            <a:normAutofit/>
-          </a:bodyPr>
-          <a:lstStyle/>
-          <a:p>
-            <a:pPr fontAlgn="base">
-              <a:spcAft>
-                <a:spcPts val="0"/>
-              </a:spcAft>
-            </a:pPr>
-            <a:r>
-              <a:rPr lang="en-US" sz="1600" b="1" i="0" u="none" strike="noStrike" dirty="0" err="1">
-                <a:solidFill>
-                  <a:srgbClr val="000000"/>
-                </a:solidFill>
-                <a:effectLst/>
-                <a:latin typeface="Arial" panose="020B0604020202020204" pitchFamily="34" charset="0"/>
-                <a:cs typeface="Arial" panose="020B0604020202020204" pitchFamily="34" charset="0"/>
-              </a:rPr>
-              <a:t>SubCategory</a:t>
-            </a:r>
-            <a:r>
-              <a:rPr lang="en-US" sz="1600" b="1" i="0" u="none" strike="noStrike" dirty="0">
-                <a:solidFill>
-                  <a:srgbClr val="000000"/>
-                </a:solidFill>
-                <a:effectLst/>
-                <a:latin typeface="Arial" panose="020B0604020202020204" pitchFamily="34" charset="0"/>
-                <a:cs typeface="Arial" panose="020B0604020202020204" pitchFamily="34" charset="0"/>
-              </a:rPr>
-              <a:t>:</a:t>
-            </a:r>
-            <a:r>
-              <a:rPr lang="en-US" sz="1600" b="0" i="0" u="none" strike="noStrike" dirty="0">
-                <a:solidFill>
-                  <a:srgbClr val="000000"/>
-                </a:solidFill>
-                <a:effectLst/>
-                <a:latin typeface="Arial" panose="020B0604020202020204" pitchFamily="34" charset="0"/>
-                <a:cs typeface="Arial" panose="020B0604020202020204" pitchFamily="34" charset="0"/>
-              </a:rPr>
-              <a:t> A more specific classification within the product category.</a:t>
-            </a:r>
-            <a:endParaRPr lang="en-US" sz="1600" b="1" i="0" u="none" strike="noStrike" dirty="0">
-              <a:solidFill>
-                <a:srgbClr val="000000"/>
-              </a:solidFill>
-              <a:effectLst/>
-              <a:latin typeface="Arial" panose="020B0604020202020204" pitchFamily="34" charset="0"/>
-              <a:cs typeface="Arial" panose="020B0604020202020204" pitchFamily="34" charset="0"/>
-            </a:endParaRPr>
-          </a:p>
-          <a:p>
-            <a:pPr fontAlgn="base">
-              <a:spcAft>
-                <a:spcPts val="0"/>
-              </a:spcAft>
-            </a:pPr>
-            <a:r>
-              <a:rPr lang="en-US" sz="1600" b="1" i="0" u="none" strike="noStrike" dirty="0">
-                <a:solidFill>
-                  <a:srgbClr val="000000"/>
-                </a:solidFill>
-                <a:effectLst/>
-                <a:latin typeface="Arial" panose="020B0604020202020204" pitchFamily="34" charset="0"/>
-                <a:cs typeface="Arial" panose="020B0604020202020204" pitchFamily="34" charset="0"/>
-              </a:rPr>
-              <a:t>Product:</a:t>
-            </a:r>
-            <a:r>
-              <a:rPr lang="en-US" sz="1600" b="0" i="0" u="none" strike="noStrike" dirty="0">
-                <a:solidFill>
-                  <a:srgbClr val="000000"/>
-                </a:solidFill>
-                <a:effectLst/>
-                <a:latin typeface="Arial" panose="020B0604020202020204" pitchFamily="34" charset="0"/>
-                <a:cs typeface="Arial" panose="020B0604020202020204" pitchFamily="34" charset="0"/>
-              </a:rPr>
-              <a:t> The name or description of the product ordered.</a:t>
-            </a:r>
-            <a:endParaRPr lang="en-US" sz="1600" b="1" i="0" u="none" strike="noStrike" dirty="0">
-              <a:solidFill>
-                <a:srgbClr val="000000"/>
-              </a:solidFill>
-              <a:effectLst/>
-              <a:latin typeface="Arial" panose="020B0604020202020204" pitchFamily="34" charset="0"/>
-              <a:cs typeface="Arial" panose="020B0604020202020204" pitchFamily="34" charset="0"/>
-            </a:endParaRPr>
-          </a:p>
-          <a:p>
-            <a:pPr fontAlgn="base">
-              <a:spcAft>
-                <a:spcPts val="0"/>
-              </a:spcAft>
-            </a:pPr>
-            <a:r>
-              <a:rPr lang="en-US" sz="1600" b="1" i="0" u="none" strike="noStrike" dirty="0">
-                <a:solidFill>
-                  <a:srgbClr val="000000"/>
-                </a:solidFill>
-                <a:effectLst/>
-                <a:latin typeface="Arial" panose="020B0604020202020204" pitchFamily="34" charset="0"/>
-                <a:cs typeface="Arial" panose="020B0604020202020204" pitchFamily="34" charset="0"/>
-              </a:rPr>
-              <a:t>Unit Price:</a:t>
-            </a:r>
-            <a:r>
-              <a:rPr lang="en-US" sz="1600" b="0" i="0" u="none" strike="noStrike" dirty="0">
-                <a:solidFill>
-                  <a:srgbClr val="000000"/>
-                </a:solidFill>
-                <a:effectLst/>
-                <a:latin typeface="Arial" panose="020B0604020202020204" pitchFamily="34" charset="0"/>
-                <a:cs typeface="Arial" panose="020B0604020202020204" pitchFamily="34" charset="0"/>
-              </a:rPr>
-              <a:t> The price per unit of the product.</a:t>
-            </a:r>
-            <a:endParaRPr lang="en-US" sz="1600" b="1" i="0" u="none" strike="noStrike" dirty="0">
-              <a:solidFill>
-                <a:srgbClr val="000000"/>
-              </a:solidFill>
-              <a:effectLst/>
-              <a:latin typeface="Arial" panose="020B0604020202020204" pitchFamily="34" charset="0"/>
-              <a:cs typeface="Arial" panose="020B0604020202020204" pitchFamily="34" charset="0"/>
-            </a:endParaRPr>
-          </a:p>
-          <a:p>
-            <a:pPr fontAlgn="base">
-              <a:spcAft>
-                <a:spcPts val="0"/>
-              </a:spcAft>
-            </a:pPr>
-            <a:r>
-              <a:rPr lang="en-US" sz="1600" b="1" i="0" u="none" strike="noStrike" dirty="0">
-                <a:solidFill>
-                  <a:srgbClr val="000000"/>
-                </a:solidFill>
-                <a:effectLst/>
-                <a:latin typeface="Arial" panose="020B0604020202020204" pitchFamily="34" charset="0"/>
-                <a:cs typeface="Arial" panose="020B0604020202020204" pitchFamily="34" charset="0"/>
-              </a:rPr>
-              <a:t>Shipping Fee:</a:t>
-            </a:r>
-            <a:r>
-              <a:rPr lang="en-US" sz="1600" b="0" i="0" u="none" strike="noStrike" dirty="0">
-                <a:solidFill>
-                  <a:srgbClr val="000000"/>
-                </a:solidFill>
-                <a:effectLst/>
-                <a:latin typeface="Arial" panose="020B0604020202020204" pitchFamily="34" charset="0"/>
-                <a:cs typeface="Arial" panose="020B0604020202020204" pitchFamily="34" charset="0"/>
-              </a:rPr>
-              <a:t> The fee charged for shipping the product.</a:t>
-            </a:r>
-            <a:endParaRPr lang="en-US" sz="1600" b="1" i="0" u="none" strike="noStrike" dirty="0">
-              <a:solidFill>
-                <a:srgbClr val="000000"/>
-              </a:solidFill>
-              <a:effectLst/>
-              <a:latin typeface="Arial" panose="020B0604020202020204" pitchFamily="34" charset="0"/>
-              <a:cs typeface="Arial" panose="020B0604020202020204" pitchFamily="34" charset="0"/>
-            </a:endParaRPr>
-          </a:p>
-          <a:p>
-            <a:pPr fontAlgn="base">
-              <a:spcAft>
-                <a:spcPts val="0"/>
-              </a:spcAft>
-            </a:pPr>
-            <a:r>
-              <a:rPr lang="en-US" sz="1600" b="1" i="0" u="none" strike="noStrike" dirty="0">
-                <a:solidFill>
-                  <a:srgbClr val="000000"/>
-                </a:solidFill>
-                <a:effectLst/>
-                <a:latin typeface="Arial" panose="020B0604020202020204" pitchFamily="34" charset="0"/>
-                <a:cs typeface="Arial" panose="020B0604020202020204" pitchFamily="34" charset="0"/>
-              </a:rPr>
-              <a:t>Order Quantity:</a:t>
-            </a:r>
-            <a:r>
-              <a:rPr lang="en-US" sz="1600" b="0" i="0" u="none" strike="noStrike" dirty="0">
-                <a:solidFill>
-                  <a:srgbClr val="000000"/>
-                </a:solidFill>
-                <a:effectLst/>
-                <a:latin typeface="Arial" panose="020B0604020202020204" pitchFamily="34" charset="0"/>
-                <a:cs typeface="Arial" panose="020B0604020202020204" pitchFamily="34" charset="0"/>
-              </a:rPr>
-              <a:t> The quantity of the product ordered.</a:t>
-            </a:r>
-            <a:endParaRPr lang="en-US" sz="1600" b="1" i="0" u="none" strike="noStrike" dirty="0">
-              <a:solidFill>
-                <a:srgbClr val="000000"/>
-              </a:solidFill>
-              <a:effectLst/>
-              <a:latin typeface="Arial" panose="020B0604020202020204" pitchFamily="34" charset="0"/>
-              <a:cs typeface="Arial" panose="020B0604020202020204" pitchFamily="34" charset="0"/>
-            </a:endParaRPr>
-          </a:p>
-          <a:p>
-            <a:pPr fontAlgn="base">
-              <a:spcAft>
-                <a:spcPts val="0"/>
-              </a:spcAft>
-            </a:pPr>
-            <a:r>
-              <a:rPr lang="en-US" sz="1600" b="1" i="0" u="none" strike="noStrike" dirty="0">
-                <a:solidFill>
-                  <a:srgbClr val="000000"/>
-                </a:solidFill>
-                <a:effectLst/>
-                <a:latin typeface="Arial" panose="020B0604020202020204" pitchFamily="34" charset="0"/>
-                <a:cs typeface="Arial" panose="020B0604020202020204" pitchFamily="34" charset="0"/>
-              </a:rPr>
-              <a:t>Sale Price:</a:t>
-            </a:r>
-            <a:r>
-              <a:rPr lang="en-US" sz="1600" b="0" i="0" u="none" strike="noStrike" dirty="0">
-                <a:solidFill>
-                  <a:srgbClr val="000000"/>
-                </a:solidFill>
-                <a:effectLst/>
-                <a:latin typeface="Arial" panose="020B0604020202020204" pitchFamily="34" charset="0"/>
-                <a:cs typeface="Arial" panose="020B0604020202020204" pitchFamily="34" charset="0"/>
-              </a:rPr>
-              <a:t> The total sale price of the order.</a:t>
-            </a:r>
-            <a:endParaRPr lang="en-US" sz="1600" b="1" i="0" u="none" strike="noStrike" dirty="0">
-              <a:solidFill>
-                <a:srgbClr val="000000"/>
-              </a:solidFill>
-              <a:effectLst/>
-              <a:latin typeface="Arial" panose="020B0604020202020204" pitchFamily="34" charset="0"/>
-              <a:cs typeface="Arial" panose="020B0604020202020204" pitchFamily="34" charset="0"/>
-            </a:endParaRPr>
-          </a:p>
-          <a:p>
-            <a:pPr fontAlgn="base">
-              <a:spcAft>
-                <a:spcPts val="0"/>
-              </a:spcAft>
-            </a:pPr>
-            <a:r>
-              <a:rPr lang="en-US" sz="1600" b="1" i="0" u="none" strike="noStrike" dirty="0">
-                <a:solidFill>
-                  <a:srgbClr val="000000"/>
-                </a:solidFill>
-                <a:effectLst/>
-                <a:latin typeface="Arial" panose="020B0604020202020204" pitchFamily="34" charset="0"/>
-                <a:cs typeface="Arial" panose="020B0604020202020204" pitchFamily="34" charset="0"/>
-              </a:rPr>
-              <a:t>Status:</a:t>
-            </a:r>
-            <a:r>
-              <a:rPr lang="en-US" sz="1600" b="0" i="0" u="none" strike="noStrike" dirty="0">
-                <a:solidFill>
-                  <a:srgbClr val="000000"/>
-                </a:solidFill>
-                <a:effectLst/>
-                <a:latin typeface="Arial" panose="020B0604020202020204" pitchFamily="34" charset="0"/>
-                <a:cs typeface="Arial" panose="020B0604020202020204" pitchFamily="34" charset="0"/>
-              </a:rPr>
-              <a:t> Current status of the order (e.g., Delivered, Returned).</a:t>
-            </a:r>
-            <a:endParaRPr lang="en-US" sz="1600" b="1" i="0" u="none" strike="noStrike" dirty="0">
-              <a:solidFill>
-                <a:srgbClr val="000000"/>
-              </a:solidFill>
-              <a:effectLst/>
-              <a:latin typeface="Arial" panose="020B0604020202020204" pitchFamily="34" charset="0"/>
-              <a:cs typeface="Arial" panose="020B0604020202020204" pitchFamily="34" charset="0"/>
-            </a:endParaRPr>
-          </a:p>
-          <a:p>
-            <a:pPr fontAlgn="base">
-              <a:spcAft>
-                <a:spcPts val="0"/>
-              </a:spcAft>
-            </a:pPr>
-            <a:r>
-              <a:rPr lang="en-US" sz="1600" b="1" i="0" u="none" strike="noStrike" dirty="0">
-                <a:solidFill>
-                  <a:srgbClr val="000000"/>
-                </a:solidFill>
-                <a:effectLst/>
-                <a:latin typeface="Arial" panose="020B0604020202020204" pitchFamily="34" charset="0"/>
-                <a:cs typeface="Arial" panose="020B0604020202020204" pitchFamily="34" charset="0"/>
-              </a:rPr>
-              <a:t>Reason: </a:t>
-            </a:r>
-            <a:r>
-              <a:rPr lang="en-US" sz="1600" b="0" i="0" u="none" strike="noStrike" dirty="0">
-                <a:solidFill>
-                  <a:srgbClr val="000000"/>
-                </a:solidFill>
-                <a:effectLst/>
-                <a:latin typeface="Arial" panose="020B0604020202020204" pitchFamily="34" charset="0"/>
-                <a:cs typeface="Arial" panose="020B0604020202020204" pitchFamily="34" charset="0"/>
-              </a:rPr>
-              <a:t>The reason for the return or an empty field if delivered.</a:t>
-            </a:r>
-            <a:endParaRPr lang="en-US" sz="1600" b="1" i="0" u="none" strike="noStrike" dirty="0">
-              <a:solidFill>
-                <a:srgbClr val="000000"/>
-              </a:solidFill>
-              <a:effectLst/>
-              <a:latin typeface="Arial" panose="020B0604020202020204" pitchFamily="34" charset="0"/>
-              <a:cs typeface="Arial" panose="020B0604020202020204" pitchFamily="34" charset="0"/>
-            </a:endParaRPr>
-          </a:p>
-          <a:p>
-            <a:r>
-              <a:rPr lang="en-US" sz="1600" b="1" i="0" u="none" strike="noStrike" dirty="0">
-                <a:solidFill>
-                  <a:srgbClr val="000000"/>
-                </a:solidFill>
-                <a:effectLst/>
-                <a:latin typeface="Arial" panose="020B0604020202020204" pitchFamily="34" charset="0"/>
-                <a:cs typeface="Arial" panose="020B0604020202020204" pitchFamily="34" charset="0"/>
-              </a:rPr>
-              <a:t>Rating:</a:t>
-            </a:r>
-            <a:r>
-              <a:rPr lang="en-US" sz="1600" b="0" i="0" u="none" strike="noStrike" dirty="0">
-                <a:solidFill>
-                  <a:srgbClr val="000000"/>
-                </a:solidFill>
-                <a:effectLst/>
-                <a:latin typeface="Arial" panose="020B0604020202020204" pitchFamily="34" charset="0"/>
-                <a:cs typeface="Arial" panose="020B0604020202020204" pitchFamily="34" charset="0"/>
-              </a:rPr>
-              <a:t> Customer rating for the order on a scale (e.g., 1 to 5).</a:t>
-            </a:r>
-            <a:endParaRPr lang="en-IN" sz="1600" dirty="0">
-              <a:latin typeface="Arial" panose="020B0604020202020204" pitchFamily="34" charset="0"/>
-              <a:cs typeface="Arial" panose="020B0604020202020204" pitchFamily="34" charset="0"/>
-            </a:endParaRPr>
-          </a:p>
-        </p:txBody>
-      </p:sp>
-    </p:spTree>
-    <p:extLst>
-      <p:ext uri="{BB962C8B-B14F-4D97-AF65-F5344CB8AC3E}">
-        <p14:creationId xmlns:p14="http://schemas.microsoft.com/office/powerpoint/2010/main" val="801283838"/>
       </p:ext>
     </p:extLst>
   </p:cSld>
